--- a/submission/NEE/figures_SI/FigS2.pptx
+++ b/submission/NEE/figures_SI/FigS2.pptx
@@ -697,7 +697,7 @@
             </a:pathLst>
           </a:custGeom>
           <a:solidFill>
-            <a:srgbClr val="E8864A"/>
+            <a:srgbClr val="E9884D"/>
           </a:solidFill>
           <a:ln w="18720">
             <a:solidFill>
@@ -760,7 +760,7 @@
             </a:pathLst>
           </a:custGeom>
           <a:solidFill>
-            <a:srgbClr val="E9874C"/>
+            <a:srgbClr val="E9894F"/>
           </a:solidFill>
           <a:ln w="18720">
             <a:solidFill>
@@ -788,6 +788,69 @@
       <p:sp>
         <p:nvSpPr>
           <p:cNvPr id="14" name=""/>
+          <p:cNvSpPr/>
+          <p:nvPr/>
+        </p:nvSpPr>
+        <p:spPr>
+          <a:xfrm>
+            <a:off x="1657080" y="2043720"/>
+            <a:ext cx="410760" cy="445320"/>
+          </a:xfrm>
+          <a:custGeom>
+            <a:avLst/>
+            <a:gdLst/>
+            <a:ahLst/>
+            <a:rect l="0" t="0" r="r" b="b"/>
+            <a:pathLst>
+              <a:path w="1141" h="1237">
+                <a:moveTo>
+                  <a:pt x="0" y="0"/>
+                </a:moveTo>
+                <a:lnTo>
+                  <a:pt x="1141" y="0"/>
+                </a:lnTo>
+                <a:lnTo>
+                  <a:pt x="1141" y="1237"/>
+                </a:lnTo>
+                <a:lnTo>
+                  <a:pt x="0" y="1237"/>
+                </a:lnTo>
+                <a:lnTo>
+                  <a:pt x="0" y="0"/>
+                </a:lnTo>
+                <a:close/>
+              </a:path>
+            </a:pathLst>
+          </a:custGeom>
+          <a:solidFill>
+            <a:srgbClr val="F4A679"/>
+          </a:solidFill>
+          <a:ln w="18720">
+            <a:solidFill>
+              <a:srgbClr val="FFFFFF"/>
+            </a:solidFill>
+            <a:miter/>
+          </a:ln>
+        </p:spPr>
+        <p:txBody>
+          <a:bodyPr lIns="9360" tIns="9360" rIns="9360" bIns="9360" anchor="t">
+            <a:noAutofit/>
+          </a:bodyPr>
+          <a:p>
+            <a:endParaRPr lang="en-US" sz="2400" b="0" u="none" strike="noStrike">
+              <a:solidFill>
+                <a:srgbClr val="000000"/>
+              </a:solidFill>
+              <a:effectLst/>
+              <a:uFillTx/>
+              <a:latin typeface="Times New Roman"/>
+            </a:endParaRPr>
+          </a:p>
+        </p:txBody>
+      </p:sp>
+      <p:sp>
+        <p:nvSpPr>
+          <p:cNvPr id="15" name=""/>
           <p:cNvSpPr/>
           <p:nvPr/>
         </p:nvSpPr>
@@ -823,7 +886,7 @@
             </a:pathLst>
           </a:custGeom>
           <a:solidFill>
-            <a:srgbClr val="F09B69"/>
+            <a:srgbClr val="F09C6A"/>
           </a:solidFill>
           <a:ln w="18720">
             <a:solidFill>
@@ -850,13 +913,13 @@
       </p:sp>
       <p:sp>
         <p:nvSpPr>
-          <p:cNvPr id="15" name=""/>
-          <p:cNvSpPr/>
-          <p:nvPr/>
-        </p:nvSpPr>
-        <p:spPr>
-          <a:xfrm>
-            <a:off x="1657080" y="2043720"/>
+          <p:cNvPr id="16" name=""/>
+          <p:cNvSpPr/>
+          <p:nvPr/>
+        </p:nvSpPr>
+        <p:spPr>
+          <a:xfrm>
+            <a:off x="1246680" y="2043720"/>
             <a:ext cx="410760" cy="445320"/>
           </a:xfrm>
           <a:custGeom>
@@ -886,7 +949,7 @@
             </a:pathLst>
           </a:custGeom>
           <a:solidFill>
-            <a:srgbClr val="F5A87C"/>
+            <a:srgbClr val="F9BA96"/>
           </a:solidFill>
           <a:ln w="18720">
             <a:solidFill>
@@ -913,13 +976,139 @@
       </p:sp>
       <p:sp>
         <p:nvSpPr>
-          <p:cNvPr id="16" name=""/>
-          <p:cNvSpPr/>
-          <p:nvPr/>
-        </p:nvSpPr>
-        <p:spPr>
-          <a:xfrm>
-            <a:off x="1246680" y="2043720"/>
+          <p:cNvPr id="17" name=""/>
+          <p:cNvSpPr/>
+          <p:nvPr/>
+        </p:nvSpPr>
+        <p:spPr>
+          <a:xfrm>
+            <a:off x="1246680" y="1599120"/>
+            <a:ext cx="410760" cy="444960"/>
+          </a:xfrm>
+          <a:custGeom>
+            <a:avLst/>
+            <a:gdLst/>
+            <a:ahLst/>
+            <a:rect l="0" t="0" r="r" b="b"/>
+            <a:pathLst>
+              <a:path w="1141" h="1236">
+                <a:moveTo>
+                  <a:pt x="0" y="0"/>
+                </a:moveTo>
+                <a:lnTo>
+                  <a:pt x="1141" y="0"/>
+                </a:lnTo>
+                <a:lnTo>
+                  <a:pt x="1141" y="1236"/>
+                </a:lnTo>
+                <a:lnTo>
+                  <a:pt x="0" y="1236"/>
+                </a:lnTo>
+                <a:lnTo>
+                  <a:pt x="0" y="0"/>
+                </a:lnTo>
+                <a:close/>
+              </a:path>
+            </a:pathLst>
+          </a:custGeom>
+          <a:solidFill>
+            <a:srgbClr val="FBC09F"/>
+          </a:solidFill>
+          <a:ln w="18720">
+            <a:solidFill>
+              <a:srgbClr val="FFFFFF"/>
+            </a:solidFill>
+            <a:miter/>
+          </a:ln>
+        </p:spPr>
+        <p:txBody>
+          <a:bodyPr lIns="9360" tIns="9360" rIns="9360" bIns="9360" anchor="t">
+            <a:noAutofit/>
+          </a:bodyPr>
+          <a:p>
+            <a:endParaRPr lang="en-US" sz="2400" b="0" u="none" strike="noStrike">
+              <a:solidFill>
+                <a:srgbClr val="000000"/>
+              </a:solidFill>
+              <a:effectLst/>
+              <a:uFillTx/>
+              <a:latin typeface="Times New Roman"/>
+            </a:endParaRPr>
+          </a:p>
+        </p:txBody>
+      </p:sp>
+      <p:sp>
+        <p:nvSpPr>
+          <p:cNvPr id="18" name=""/>
+          <p:cNvSpPr/>
+          <p:nvPr/>
+        </p:nvSpPr>
+        <p:spPr>
+          <a:xfrm>
+            <a:off x="2067120" y="1154160"/>
+            <a:ext cx="411120" cy="445320"/>
+          </a:xfrm>
+          <a:custGeom>
+            <a:avLst/>
+            <a:gdLst/>
+            <a:ahLst/>
+            <a:rect l="0" t="0" r="r" b="b"/>
+            <a:pathLst>
+              <a:path w="1142" h="1237">
+                <a:moveTo>
+                  <a:pt x="0" y="0"/>
+                </a:moveTo>
+                <a:lnTo>
+                  <a:pt x="1142" y="0"/>
+                </a:lnTo>
+                <a:lnTo>
+                  <a:pt x="1142" y="1237"/>
+                </a:lnTo>
+                <a:lnTo>
+                  <a:pt x="0" y="1237"/>
+                </a:lnTo>
+                <a:lnTo>
+                  <a:pt x="0" y="0"/>
+                </a:lnTo>
+                <a:close/>
+              </a:path>
+            </a:pathLst>
+          </a:custGeom>
+          <a:solidFill>
+            <a:srgbClr val="FFDFCD"/>
+          </a:solidFill>
+          <a:ln w="18720">
+            <a:solidFill>
+              <a:srgbClr val="FFFFFF"/>
+            </a:solidFill>
+            <a:miter/>
+          </a:ln>
+        </p:spPr>
+        <p:txBody>
+          <a:bodyPr lIns="9360" tIns="9360" rIns="9360" bIns="9360" anchor="t">
+            <a:noAutofit/>
+          </a:bodyPr>
+          <a:p>
+            <a:endParaRPr lang="en-US" sz="2400" b="0" u="none" strike="noStrike">
+              <a:solidFill>
+                <a:srgbClr val="000000"/>
+              </a:solidFill>
+              <a:effectLst/>
+              <a:uFillTx/>
+              <a:latin typeface="Times New Roman"/>
+            </a:endParaRPr>
+          </a:p>
+        </p:txBody>
+      </p:sp>
+      <p:sp>
+        <p:nvSpPr>
+          <p:cNvPr id="19" name=""/>
+          <p:cNvSpPr/>
+          <p:nvPr/>
+        </p:nvSpPr>
+        <p:spPr>
+          <a:xfrm>
+            <a:off x="1657080" y="1154160"/>
             <a:ext cx="410760" cy="445320"/>
           </a:xfrm>
           <a:custGeom>
@@ -949,7 +1138,7 @@
             </a:pathLst>
           </a:custGeom>
           <a:solidFill>
-            <a:srgbClr val="FABB98"/>
+            <a:srgbClr val="FBFDFE"/>
           </a:solidFill>
           <a:ln w="18720">
             <a:solidFill>
@@ -976,14 +1165,14 @@
       </p:sp>
       <p:sp>
         <p:nvSpPr>
-          <p:cNvPr id="17" name=""/>
-          <p:cNvSpPr/>
-          <p:nvPr/>
-        </p:nvSpPr>
-        <p:spPr>
-          <a:xfrm>
-            <a:off x="1246680" y="1599120"/>
-            <a:ext cx="410760" cy="444960"/>
+          <p:cNvPr id="20" name=""/>
+          <p:cNvSpPr/>
+          <p:nvPr/>
+        </p:nvSpPr>
+        <p:spPr>
+          <a:xfrm>
+            <a:off x="2477880" y="1154160"/>
+            <a:ext cx="410760" cy="445320"/>
           </a:xfrm>
           <a:custGeom>
             <a:avLst/>
@@ -991,7 +1180,7 @@
             <a:ahLst/>
             <a:rect l="0" t="0" r="r" b="b"/>
             <a:pathLst>
-              <a:path w="1141" h="1236">
+              <a:path w="1141" h="1237">
                 <a:moveTo>
                   <a:pt x="0" y="0"/>
                 </a:moveTo>
@@ -999,10 +1188,10 @@
                   <a:pt x="1141" y="0"/>
                 </a:lnTo>
                 <a:lnTo>
-                  <a:pt x="1141" y="1236"/>
-                </a:lnTo>
-                <a:lnTo>
-                  <a:pt x="0" y="1236"/>
+                  <a:pt x="1141" y="1237"/>
+                </a:lnTo>
+                <a:lnTo>
+                  <a:pt x="0" y="1237"/>
                 </a:lnTo>
                 <a:lnTo>
                   <a:pt x="0" y="0"/>
@@ -1012,7 +1201,7 @@
             </a:pathLst>
           </a:custGeom>
           <a:solidFill>
-            <a:srgbClr val="FBBF9E"/>
+            <a:srgbClr val="FFF0E9"/>
           </a:solidFill>
           <a:ln w="18720">
             <a:solidFill>
@@ -1039,13 +1228,202 @@
       </p:sp>
       <p:sp>
         <p:nvSpPr>
-          <p:cNvPr id="18" name=""/>
-          <p:cNvSpPr/>
-          <p:nvPr/>
-        </p:nvSpPr>
-        <p:spPr>
-          <a:xfrm>
-            <a:off x="2067120" y="1154160"/>
+          <p:cNvPr id="21" name=""/>
+          <p:cNvSpPr/>
+          <p:nvPr/>
+        </p:nvSpPr>
+        <p:spPr>
+          <a:xfrm>
+            <a:off x="1246680" y="1154160"/>
+            <a:ext cx="410760" cy="445320"/>
+          </a:xfrm>
+          <a:custGeom>
+            <a:avLst/>
+            <a:gdLst/>
+            <a:ahLst/>
+            <a:rect l="0" t="0" r="r" b="b"/>
+            <a:pathLst>
+              <a:path w="1141" h="1237">
+                <a:moveTo>
+                  <a:pt x="0" y="0"/>
+                </a:moveTo>
+                <a:lnTo>
+                  <a:pt x="1141" y="0"/>
+                </a:lnTo>
+                <a:lnTo>
+                  <a:pt x="1141" y="1237"/>
+                </a:lnTo>
+                <a:lnTo>
+                  <a:pt x="0" y="1237"/>
+                </a:lnTo>
+                <a:lnTo>
+                  <a:pt x="0" y="0"/>
+                </a:lnTo>
+                <a:close/>
+              </a:path>
+            </a:pathLst>
+          </a:custGeom>
+          <a:solidFill>
+            <a:srgbClr val="FFF5EF"/>
+          </a:solidFill>
+          <a:ln w="18720">
+            <a:solidFill>
+              <a:srgbClr val="FFFFFF"/>
+            </a:solidFill>
+            <a:miter/>
+          </a:ln>
+        </p:spPr>
+        <p:txBody>
+          <a:bodyPr lIns="9360" tIns="9360" rIns="9360" bIns="9360" anchor="t">
+            <a:noAutofit/>
+          </a:bodyPr>
+          <a:p>
+            <a:endParaRPr lang="en-US" sz="2400" b="0" u="none" strike="noStrike">
+              <a:solidFill>
+                <a:srgbClr val="000000"/>
+              </a:solidFill>
+              <a:effectLst/>
+              <a:uFillTx/>
+              <a:latin typeface="Times New Roman"/>
+            </a:endParaRPr>
+          </a:p>
+        </p:txBody>
+      </p:sp>
+      <p:sp>
+        <p:nvSpPr>
+          <p:cNvPr id="22" name=""/>
+          <p:cNvSpPr/>
+          <p:nvPr/>
+        </p:nvSpPr>
+        <p:spPr>
+          <a:xfrm>
+            <a:off x="1657080" y="709200"/>
+            <a:ext cx="410760" cy="445320"/>
+          </a:xfrm>
+          <a:custGeom>
+            <a:avLst/>
+            <a:gdLst/>
+            <a:ahLst/>
+            <a:rect l="0" t="0" r="r" b="b"/>
+            <a:pathLst>
+              <a:path w="1141" h="1237">
+                <a:moveTo>
+                  <a:pt x="0" y="0"/>
+                </a:moveTo>
+                <a:lnTo>
+                  <a:pt x="1141" y="0"/>
+                </a:lnTo>
+                <a:lnTo>
+                  <a:pt x="1141" y="1237"/>
+                </a:lnTo>
+                <a:lnTo>
+                  <a:pt x="0" y="1237"/>
+                </a:lnTo>
+                <a:lnTo>
+                  <a:pt x="0" y="0"/>
+                </a:lnTo>
+                <a:close/>
+              </a:path>
+            </a:pathLst>
+          </a:custGeom>
+          <a:solidFill>
+            <a:srgbClr val="F0F7FD"/>
+          </a:solidFill>
+          <a:ln w="18720">
+            <a:solidFill>
+              <a:srgbClr val="FFFFFF"/>
+            </a:solidFill>
+            <a:miter/>
+          </a:ln>
+        </p:spPr>
+        <p:txBody>
+          <a:bodyPr lIns="9360" tIns="9360" rIns="9360" bIns="9360" anchor="t">
+            <a:noAutofit/>
+          </a:bodyPr>
+          <a:p>
+            <a:endParaRPr lang="en-US" sz="2400" b="0" u="none" strike="noStrike">
+              <a:solidFill>
+                <a:srgbClr val="000000"/>
+              </a:solidFill>
+              <a:effectLst/>
+              <a:uFillTx/>
+              <a:latin typeface="Times New Roman"/>
+            </a:endParaRPr>
+          </a:p>
+        </p:txBody>
+      </p:sp>
+      <p:sp>
+        <p:nvSpPr>
+          <p:cNvPr id="23" name=""/>
+          <p:cNvSpPr/>
+          <p:nvPr/>
+        </p:nvSpPr>
+        <p:spPr>
+          <a:xfrm>
+            <a:off x="2477880" y="709200"/>
+            <a:ext cx="410760" cy="445320"/>
+          </a:xfrm>
+          <a:custGeom>
+            <a:avLst/>
+            <a:gdLst/>
+            <a:ahLst/>
+            <a:rect l="0" t="0" r="r" b="b"/>
+            <a:pathLst>
+              <a:path w="1141" h="1237">
+                <a:moveTo>
+                  <a:pt x="0" y="0"/>
+                </a:moveTo>
+                <a:lnTo>
+                  <a:pt x="1141" y="0"/>
+                </a:lnTo>
+                <a:lnTo>
+                  <a:pt x="1141" y="1237"/>
+                </a:lnTo>
+                <a:lnTo>
+                  <a:pt x="0" y="1237"/>
+                </a:lnTo>
+                <a:lnTo>
+                  <a:pt x="0" y="0"/>
+                </a:lnTo>
+                <a:close/>
+              </a:path>
+            </a:pathLst>
+          </a:custGeom>
+          <a:solidFill>
+            <a:srgbClr val="FFFCFA"/>
+          </a:solidFill>
+          <a:ln w="18720">
+            <a:solidFill>
+              <a:srgbClr val="FFFFFF"/>
+            </a:solidFill>
+            <a:miter/>
+          </a:ln>
+        </p:spPr>
+        <p:txBody>
+          <a:bodyPr lIns="9360" tIns="9360" rIns="9360" bIns="9360" anchor="t">
+            <a:noAutofit/>
+          </a:bodyPr>
+          <a:p>
+            <a:endParaRPr lang="en-US" sz="2400" b="0" u="none" strike="noStrike">
+              <a:solidFill>
+                <a:srgbClr val="000000"/>
+              </a:solidFill>
+              <a:effectLst/>
+              <a:uFillTx/>
+              <a:latin typeface="Times New Roman"/>
+            </a:endParaRPr>
+          </a:p>
+        </p:txBody>
+      </p:sp>
+      <p:sp>
+        <p:nvSpPr>
+          <p:cNvPr id="24" name=""/>
+          <p:cNvSpPr/>
+          <p:nvPr/>
+        </p:nvSpPr>
+        <p:spPr>
+          <a:xfrm>
+            <a:off x="2067120" y="709200"/>
             <a:ext cx="411120" cy="445320"/>
           </a:xfrm>
           <a:custGeom>
@@ -1075,7 +1453,7 @@
             </a:pathLst>
           </a:custGeom>
           <a:solidFill>
-            <a:srgbClr val="FFDFCF"/>
+            <a:srgbClr val="FFF2EB"/>
           </a:solidFill>
           <a:ln w="18720">
             <a:solidFill>
@@ -1102,13 +1480,13 @@
       </p:sp>
       <p:sp>
         <p:nvSpPr>
-          <p:cNvPr id="19" name=""/>
-          <p:cNvSpPr/>
-          <p:nvPr/>
-        </p:nvSpPr>
-        <p:spPr>
-          <a:xfrm>
-            <a:off x="1657080" y="1154160"/>
+          <p:cNvPr id="25" name=""/>
+          <p:cNvSpPr/>
+          <p:nvPr/>
+        </p:nvSpPr>
+        <p:spPr>
+          <a:xfrm>
+            <a:off x="1246680" y="709200"/>
             <a:ext cx="410760" cy="445320"/>
           </a:xfrm>
           <a:custGeom>
@@ -1138,385 +1516,7 @@
             </a:pathLst>
           </a:custGeom>
           <a:solidFill>
-            <a:srgbClr val="FAFCFE"/>
-          </a:solidFill>
-          <a:ln w="18720">
-            <a:solidFill>
-              <a:srgbClr val="FFFFFF"/>
-            </a:solidFill>
-            <a:miter/>
-          </a:ln>
-        </p:spPr>
-        <p:txBody>
-          <a:bodyPr lIns="9360" tIns="9360" rIns="9360" bIns="9360" anchor="t">
-            <a:noAutofit/>
-          </a:bodyPr>
-          <a:p>
-            <a:endParaRPr lang="en-US" sz="2400" b="0" u="none" strike="noStrike">
-              <a:solidFill>
-                <a:srgbClr val="000000"/>
-              </a:solidFill>
-              <a:effectLst/>
-              <a:uFillTx/>
-              <a:latin typeface="Times New Roman"/>
-            </a:endParaRPr>
-          </a:p>
-        </p:txBody>
-      </p:sp>
-      <p:sp>
-        <p:nvSpPr>
-          <p:cNvPr id="20" name=""/>
-          <p:cNvSpPr/>
-          <p:nvPr/>
-        </p:nvSpPr>
-        <p:spPr>
-          <a:xfrm>
-            <a:off x="2477880" y="1154160"/>
-            <a:ext cx="410760" cy="445320"/>
-          </a:xfrm>
-          <a:custGeom>
-            <a:avLst/>
-            <a:gdLst/>
-            <a:ahLst/>
-            <a:rect l="0" t="0" r="r" b="b"/>
-            <a:pathLst>
-              <a:path w="1141" h="1237">
-                <a:moveTo>
-                  <a:pt x="0" y="0"/>
-                </a:moveTo>
-                <a:lnTo>
-                  <a:pt x="1141" y="0"/>
-                </a:lnTo>
-                <a:lnTo>
-                  <a:pt x="1141" y="1237"/>
-                </a:lnTo>
-                <a:lnTo>
-                  <a:pt x="0" y="1237"/>
-                </a:lnTo>
-                <a:lnTo>
-                  <a:pt x="0" y="0"/>
-                </a:lnTo>
-                <a:close/>
-              </a:path>
-            </a:pathLst>
-          </a:custGeom>
-          <a:solidFill>
-            <a:srgbClr val="FFF1E9"/>
-          </a:solidFill>
-          <a:ln w="18720">
-            <a:solidFill>
-              <a:srgbClr val="FFFFFF"/>
-            </a:solidFill>
-            <a:miter/>
-          </a:ln>
-        </p:spPr>
-        <p:txBody>
-          <a:bodyPr lIns="9360" tIns="9360" rIns="9360" bIns="9360" anchor="t">
-            <a:noAutofit/>
-          </a:bodyPr>
-          <a:p>
-            <a:endParaRPr lang="en-US" sz="2400" b="0" u="none" strike="noStrike">
-              <a:solidFill>
-                <a:srgbClr val="000000"/>
-              </a:solidFill>
-              <a:effectLst/>
-              <a:uFillTx/>
-              <a:latin typeface="Times New Roman"/>
-            </a:endParaRPr>
-          </a:p>
-        </p:txBody>
-      </p:sp>
-      <p:sp>
-        <p:nvSpPr>
-          <p:cNvPr id="21" name=""/>
-          <p:cNvSpPr/>
-          <p:nvPr/>
-        </p:nvSpPr>
-        <p:spPr>
-          <a:xfrm>
-            <a:off x="1246680" y="1154160"/>
-            <a:ext cx="410760" cy="445320"/>
-          </a:xfrm>
-          <a:custGeom>
-            <a:avLst/>
-            <a:gdLst/>
-            <a:ahLst/>
-            <a:rect l="0" t="0" r="r" b="b"/>
-            <a:pathLst>
-              <a:path w="1141" h="1237">
-                <a:moveTo>
-                  <a:pt x="0" y="0"/>
-                </a:moveTo>
-                <a:lnTo>
-                  <a:pt x="1141" y="0"/>
-                </a:lnTo>
-                <a:lnTo>
-                  <a:pt x="1141" y="1237"/>
-                </a:lnTo>
-                <a:lnTo>
-                  <a:pt x="0" y="1237"/>
-                </a:lnTo>
-                <a:lnTo>
-                  <a:pt x="0" y="0"/>
-                </a:lnTo>
-                <a:close/>
-              </a:path>
-            </a:pathLst>
-          </a:custGeom>
-          <a:solidFill>
-            <a:srgbClr val="FFF4EF"/>
-          </a:solidFill>
-          <a:ln w="18720">
-            <a:solidFill>
-              <a:srgbClr val="FFFFFF"/>
-            </a:solidFill>
-            <a:miter/>
-          </a:ln>
-        </p:spPr>
-        <p:txBody>
-          <a:bodyPr lIns="9360" tIns="9360" rIns="9360" bIns="9360" anchor="t">
-            <a:noAutofit/>
-          </a:bodyPr>
-          <a:p>
-            <a:endParaRPr lang="en-US" sz="2400" b="0" u="none" strike="noStrike">
-              <a:solidFill>
-                <a:srgbClr val="000000"/>
-              </a:solidFill>
-              <a:effectLst/>
-              <a:uFillTx/>
-              <a:latin typeface="Times New Roman"/>
-            </a:endParaRPr>
-          </a:p>
-        </p:txBody>
-      </p:sp>
-      <p:sp>
-        <p:nvSpPr>
-          <p:cNvPr id="22" name=""/>
-          <p:cNvSpPr/>
-          <p:nvPr/>
-        </p:nvSpPr>
-        <p:spPr>
-          <a:xfrm>
-            <a:off x="1657080" y="709200"/>
-            <a:ext cx="410760" cy="445320"/>
-          </a:xfrm>
-          <a:custGeom>
-            <a:avLst/>
-            <a:gdLst/>
-            <a:ahLst/>
-            <a:rect l="0" t="0" r="r" b="b"/>
-            <a:pathLst>
-              <a:path w="1141" h="1237">
-                <a:moveTo>
-                  <a:pt x="0" y="0"/>
-                </a:moveTo>
-                <a:lnTo>
-                  <a:pt x="1141" y="0"/>
-                </a:lnTo>
-                <a:lnTo>
-                  <a:pt x="1141" y="1237"/>
-                </a:lnTo>
-                <a:lnTo>
-                  <a:pt x="0" y="1237"/>
-                </a:lnTo>
-                <a:lnTo>
-                  <a:pt x="0" y="0"/>
-                </a:lnTo>
-                <a:close/>
-              </a:path>
-            </a:pathLst>
-          </a:custGeom>
-          <a:solidFill>
-            <a:srgbClr val="EFF6FD"/>
-          </a:solidFill>
-          <a:ln w="18720">
-            <a:solidFill>
-              <a:srgbClr val="FFFFFF"/>
-            </a:solidFill>
-            <a:miter/>
-          </a:ln>
-        </p:spPr>
-        <p:txBody>
-          <a:bodyPr lIns="9360" tIns="9360" rIns="9360" bIns="9360" anchor="t">
-            <a:noAutofit/>
-          </a:bodyPr>
-          <a:p>
-            <a:endParaRPr lang="en-US" sz="2400" b="0" u="none" strike="noStrike">
-              <a:solidFill>
-                <a:srgbClr val="000000"/>
-              </a:solidFill>
-              <a:effectLst/>
-              <a:uFillTx/>
-              <a:latin typeface="Times New Roman"/>
-            </a:endParaRPr>
-          </a:p>
-        </p:txBody>
-      </p:sp>
-      <p:sp>
-        <p:nvSpPr>
-          <p:cNvPr id="23" name=""/>
-          <p:cNvSpPr/>
-          <p:nvPr/>
-        </p:nvSpPr>
-        <p:spPr>
-          <a:xfrm>
-            <a:off x="2477880" y="709200"/>
-            <a:ext cx="410760" cy="445320"/>
-          </a:xfrm>
-          <a:custGeom>
-            <a:avLst/>
-            <a:gdLst/>
-            <a:ahLst/>
-            <a:rect l="0" t="0" r="r" b="b"/>
-            <a:pathLst>
-              <a:path w="1141" h="1237">
-                <a:moveTo>
-                  <a:pt x="0" y="0"/>
-                </a:moveTo>
-                <a:lnTo>
-                  <a:pt x="1141" y="0"/>
-                </a:lnTo>
-                <a:lnTo>
-                  <a:pt x="1141" y="1237"/>
-                </a:lnTo>
-                <a:lnTo>
-                  <a:pt x="0" y="1237"/>
-                </a:lnTo>
-                <a:lnTo>
-                  <a:pt x="0" y="0"/>
-                </a:lnTo>
-                <a:close/>
-              </a:path>
-            </a:pathLst>
-          </a:custGeom>
-          <a:solidFill>
-            <a:srgbClr val="FFFDFD"/>
-          </a:solidFill>
-          <a:ln w="18720">
-            <a:solidFill>
-              <a:srgbClr val="FFFFFF"/>
-            </a:solidFill>
-            <a:miter/>
-          </a:ln>
-        </p:spPr>
-        <p:txBody>
-          <a:bodyPr lIns="9360" tIns="9360" rIns="9360" bIns="9360" anchor="t">
-            <a:noAutofit/>
-          </a:bodyPr>
-          <a:p>
-            <a:endParaRPr lang="en-US" sz="2400" b="0" u="none" strike="noStrike">
-              <a:solidFill>
-                <a:srgbClr val="000000"/>
-              </a:solidFill>
-              <a:effectLst/>
-              <a:uFillTx/>
-              <a:latin typeface="Times New Roman"/>
-            </a:endParaRPr>
-          </a:p>
-        </p:txBody>
-      </p:sp>
-      <p:sp>
-        <p:nvSpPr>
-          <p:cNvPr id="24" name=""/>
-          <p:cNvSpPr/>
-          <p:nvPr/>
-        </p:nvSpPr>
-        <p:spPr>
-          <a:xfrm>
-            <a:off x="2067120" y="709200"/>
-            <a:ext cx="411120" cy="445320"/>
-          </a:xfrm>
-          <a:custGeom>
-            <a:avLst/>
-            <a:gdLst/>
-            <a:ahLst/>
-            <a:rect l="0" t="0" r="r" b="b"/>
-            <a:pathLst>
-              <a:path w="1142" h="1237">
-                <a:moveTo>
-                  <a:pt x="0" y="0"/>
-                </a:moveTo>
-                <a:lnTo>
-                  <a:pt x="1142" y="0"/>
-                </a:lnTo>
-                <a:lnTo>
-                  <a:pt x="1142" y="1237"/>
-                </a:lnTo>
-                <a:lnTo>
-                  <a:pt x="0" y="1237"/>
-                </a:lnTo>
-                <a:lnTo>
-                  <a:pt x="0" y="0"/>
-                </a:lnTo>
-                <a:close/>
-              </a:path>
-            </a:pathLst>
-          </a:custGeom>
-          <a:solidFill>
-            <a:srgbClr val="FFF3ED"/>
-          </a:solidFill>
-          <a:ln w="18720">
-            <a:solidFill>
-              <a:srgbClr val="FFFFFF"/>
-            </a:solidFill>
-            <a:miter/>
-          </a:ln>
-        </p:spPr>
-        <p:txBody>
-          <a:bodyPr lIns="9360" tIns="9360" rIns="9360" bIns="9360" anchor="t">
-            <a:noAutofit/>
-          </a:bodyPr>
-          <a:p>
-            <a:endParaRPr lang="en-US" sz="2400" b="0" u="none" strike="noStrike">
-              <a:solidFill>
-                <a:srgbClr val="000000"/>
-              </a:solidFill>
-              <a:effectLst/>
-              <a:uFillTx/>
-              <a:latin typeface="Times New Roman"/>
-            </a:endParaRPr>
-          </a:p>
-        </p:txBody>
-      </p:sp>
-      <p:sp>
-        <p:nvSpPr>
-          <p:cNvPr id="25" name=""/>
-          <p:cNvSpPr/>
-          <p:nvPr/>
-        </p:nvSpPr>
-        <p:spPr>
-          <a:xfrm>
-            <a:off x="1246680" y="709200"/>
-            <a:ext cx="410760" cy="445320"/>
-          </a:xfrm>
-          <a:custGeom>
-            <a:avLst/>
-            <a:gdLst/>
-            <a:ahLst/>
-            <a:rect l="0" t="0" r="r" b="b"/>
-            <a:pathLst>
-              <a:path w="1141" h="1237">
-                <a:moveTo>
-                  <a:pt x="0" y="0"/>
-                </a:moveTo>
-                <a:lnTo>
-                  <a:pt x="1141" y="0"/>
-                </a:lnTo>
-                <a:lnTo>
-                  <a:pt x="1141" y="1237"/>
-                </a:lnTo>
-                <a:lnTo>
-                  <a:pt x="0" y="1237"/>
-                </a:lnTo>
-                <a:lnTo>
-                  <a:pt x="0" y="0"/>
-                </a:lnTo>
-                <a:close/>
-              </a:path>
-            </a:pathLst>
-          </a:custGeom>
-          <a:solidFill>
-            <a:srgbClr val="FAFCFE"/>
+            <a:srgbClr val="F9FCFE"/>
           </a:solidFill>
           <a:ln w="18720">
             <a:solidFill>
@@ -1720,7 +1720,7 @@
                 <a:latin typeface="Arial"/>
                 <a:ea typeface="Arial"/>
               </a:rPr>
-              <a:t>1.30***</a:t>
+              <a:t>1.29***</a:t>
             </a:r>
             <a:endParaRPr lang="en-US" sz="810" b="0" u="none" strike="noStrike">
               <a:solidFill>
@@ -1736,6 +1736,54 @@
       <p:sp>
         <p:nvSpPr>
           <p:cNvPr id="30" name=""/>
+          <p:cNvSpPr txBox="1"/>
+          <p:nvPr/>
+        </p:nvSpPr>
+        <p:spPr>
+          <a:xfrm>
+            <a:off x="1697040" y="2215800"/>
+            <a:ext cx="323280" cy="104040"/>
+          </a:xfrm>
+          <a:prstGeom prst="rect">
+            <a:avLst/>
+          </a:prstGeom>
+          <a:noFill/>
+          <a:ln w="0">
+            <a:noFill/>
+          </a:ln>
+        </p:spPr>
+        <p:txBody>
+          <a:bodyPr wrap="none" lIns="0" tIns="0" rIns="0" bIns="0" anchor="t">
+            <a:spAutoFit/>
+          </a:bodyPr>
+          <a:p>
+            <a:pPr/>
+            <a:r>
+              <a:rPr lang="en-US" sz="810" b="0" u="none" strike="noStrike">
+                <a:solidFill>
+                  <a:srgbClr val="1A1A1A"/>
+                </a:solidFill>
+                <a:effectLst/>
+                <a:uFillTx/>
+                <a:latin typeface="Arial"/>
+                <a:ea typeface="Arial"/>
+              </a:rPr>
+              <a:t>1.22***</a:t>
+            </a:r>
+            <a:endParaRPr lang="en-US" sz="810" b="0" u="none" strike="noStrike">
+              <a:solidFill>
+                <a:srgbClr val="000000"/>
+              </a:solidFill>
+              <a:effectLst/>
+              <a:uFillTx/>
+              <a:latin typeface="Times New Roman"/>
+            </a:endParaRPr>
+          </a:p>
+        </p:txBody>
+      </p:sp>
+      <p:sp>
+        <p:nvSpPr>
+          <p:cNvPr id="31" name=""/>
           <p:cNvSpPr txBox="1"/>
           <p:nvPr/>
         </p:nvSpPr>
@@ -1783,54 +1831,6 @@
       </p:sp>
       <p:sp>
         <p:nvSpPr>
-          <p:cNvPr id="31" name=""/>
-          <p:cNvSpPr txBox="1"/>
-          <p:nvPr/>
-        </p:nvSpPr>
-        <p:spPr>
-          <a:xfrm>
-            <a:off x="1697040" y="2215800"/>
-            <a:ext cx="323280" cy="104040"/>
-          </a:xfrm>
-          <a:prstGeom prst="rect">
-            <a:avLst/>
-          </a:prstGeom>
-          <a:noFill/>
-          <a:ln w="0">
-            <a:noFill/>
-          </a:ln>
-        </p:spPr>
-        <p:txBody>
-          <a:bodyPr wrap="none" lIns="0" tIns="0" rIns="0" bIns="0" anchor="t">
-            <a:spAutoFit/>
-          </a:bodyPr>
-          <a:p>
-            <a:pPr/>
-            <a:r>
-              <a:rPr lang="en-US" sz="810" b="0" u="none" strike="noStrike">
-                <a:solidFill>
-                  <a:srgbClr val="1A1A1A"/>
-                </a:solidFill>
-                <a:effectLst/>
-                <a:uFillTx/>
-                <a:latin typeface="Arial"/>
-                <a:ea typeface="Arial"/>
-              </a:rPr>
-              <a:t>1.21***</a:t>
-            </a:r>
-            <a:endParaRPr lang="en-US" sz="810" b="0" u="none" strike="noStrike">
-              <a:solidFill>
-                <a:srgbClr val="000000"/>
-              </a:solidFill>
-              <a:effectLst/>
-              <a:uFillTx/>
-              <a:latin typeface="Times New Roman"/>
-            </a:endParaRPr>
-          </a:p>
-        </p:txBody>
-      </p:sp>
-      <p:sp>
-        <p:nvSpPr>
           <p:cNvPr id="32" name=""/>
           <p:cNvSpPr txBox="1"/>
           <p:nvPr/>
@@ -2056,7 +2056,7 @@
                 <a:latin typeface="Arial"/>
                 <a:ea typeface="Arial"/>
               </a:rPr>
-              <a:t>1.03</a:t>
+              <a:t>1.04</a:t>
             </a:r>
             <a:endParaRPr lang="en-US" sz="810" b="0" u="none" strike="noStrike">
               <a:solidFill>
@@ -2200,7 +2200,7 @@
                 <a:latin typeface="Arial"/>
                 <a:ea typeface="Arial"/>
               </a:rPr>
-              <a:t>1.00</a:t>
+              <a:t>1.01</a:t>
             </a:r>
             <a:endParaRPr lang="en-US" sz="810" b="0" u="none" strike="noStrike">
               <a:solidFill>
@@ -3264,7 +3264,7 @@
         </p:nvSpPr>
         <p:spPr>
           <a:xfrm>
-            <a:off x="3210120" y="1915200"/>
+            <a:off x="3210120" y="1918800"/>
             <a:ext cx="22680" cy="0"/>
           </a:xfrm>
           <a:prstGeom prst="line">
@@ -3307,7 +3307,7 @@
         </p:nvSpPr>
         <p:spPr>
           <a:xfrm>
-            <a:off x="3210120" y="1786320"/>
+            <a:off x="3210120" y="1790280"/>
             <a:ext cx="22680" cy="0"/>
           </a:xfrm>
           <a:prstGeom prst="line">
@@ -3350,7 +3350,7 @@
         </p:nvSpPr>
         <p:spPr>
           <a:xfrm>
-            <a:off x="3210120" y="1657440"/>
+            <a:off x="3210120" y="1661400"/>
             <a:ext cx="22680" cy="0"/>
           </a:xfrm>
           <a:prstGeom prst="line">
@@ -3393,7 +3393,7 @@
         </p:nvSpPr>
         <p:spPr>
           <a:xfrm>
-            <a:off x="3210120" y="1528200"/>
+            <a:off x="3210120" y="1532880"/>
             <a:ext cx="22680" cy="0"/>
           </a:xfrm>
           <a:prstGeom prst="line">
@@ -3435,8 +3435,8 @@
           <p:nvPr/>
         </p:nvSpPr>
         <p:spPr>
-          <a:xfrm flipH="1">
-            <a:off x="3119040" y="1915200"/>
+          <a:xfrm>
+            <a:off x="3210120" y="1404000"/>
             <a:ext cx="22680" cy="0"/>
           </a:xfrm>
           <a:prstGeom prst="line">
@@ -3479,7 +3479,7 @@
         </p:nvSpPr>
         <p:spPr>
           <a:xfrm flipH="1">
-            <a:off x="3119040" y="1786320"/>
+            <a:off x="3119040" y="1918800"/>
             <a:ext cx="22680" cy="0"/>
           </a:xfrm>
           <a:prstGeom prst="line">
@@ -3522,7 +3522,7 @@
         </p:nvSpPr>
         <p:spPr>
           <a:xfrm flipH="1">
-            <a:off x="3119040" y="1657440"/>
+            <a:off x="3119040" y="1790280"/>
             <a:ext cx="22680" cy="0"/>
           </a:xfrm>
           <a:prstGeom prst="line">
@@ -3565,7 +3565,7 @@
         </p:nvSpPr>
         <p:spPr>
           <a:xfrm flipH="1">
-            <a:off x="3119040" y="1528200"/>
+            <a:off x="3119040" y="1661400"/>
             <a:ext cx="22680" cy="0"/>
           </a:xfrm>
           <a:prstGeom prst="line">
@@ -3603,6 +3603,92 @@
       <p:sp>
         <p:nvSpPr>
           <p:cNvPr id="71" name=""/>
+          <p:cNvSpPr/>
+          <p:nvPr/>
+        </p:nvSpPr>
+        <p:spPr>
+          <a:xfrm flipH="1">
+            <a:off x="3119040" y="1532880"/>
+            <a:ext cx="22680" cy="0"/>
+          </a:xfrm>
+          <a:prstGeom prst="line">
+            <a:avLst/>
+          </a:prstGeom>
+          <a:ln w="4680">
+            <a:solidFill>
+              <a:srgbClr val="FFFFFF"/>
+            </a:solidFill>
+            <a:round/>
+          </a:ln>
+        </p:spPr>
+        <p:style>
+          <a:lnRef idx="0"/>
+          <a:fillRef idx="0"/>
+          <a:effectRef idx="0"/>
+          <a:fontRef idx="minor"/>
+        </p:style>
+        <p:txBody>
+          <a:bodyPr lIns="2160" tIns="-2160" rIns="2160" bIns="-2160" anchor="t">
+            <a:noAutofit/>
+          </a:bodyPr>
+          <a:p>
+            <a:endParaRPr lang="en-US" sz="2400" b="0" u="none" strike="noStrike">
+              <a:solidFill>
+                <a:srgbClr val="000000"/>
+              </a:solidFill>
+              <a:effectLst/>
+              <a:uFillTx/>
+              <a:latin typeface="Times New Roman"/>
+            </a:endParaRPr>
+          </a:p>
+        </p:txBody>
+      </p:sp>
+      <p:sp>
+        <p:nvSpPr>
+          <p:cNvPr id="72" name=""/>
+          <p:cNvSpPr/>
+          <p:nvPr/>
+        </p:nvSpPr>
+        <p:spPr>
+          <a:xfrm flipH="1">
+            <a:off x="3119040" y="1404000"/>
+            <a:ext cx="22680" cy="0"/>
+          </a:xfrm>
+          <a:prstGeom prst="line">
+            <a:avLst/>
+          </a:prstGeom>
+          <a:ln w="4680">
+            <a:solidFill>
+              <a:srgbClr val="FFFFFF"/>
+            </a:solidFill>
+            <a:round/>
+          </a:ln>
+        </p:spPr>
+        <p:style>
+          <a:lnRef idx="0"/>
+          <a:fillRef idx="0"/>
+          <a:effectRef idx="0"/>
+          <a:fontRef idx="minor"/>
+        </p:style>
+        <p:txBody>
+          <a:bodyPr lIns="2160" tIns="-2160" rIns="2160" bIns="-2160" anchor="t">
+            <a:noAutofit/>
+          </a:bodyPr>
+          <a:p>
+            <a:endParaRPr lang="en-US" sz="2400" b="0" u="none" strike="noStrike">
+              <a:solidFill>
+                <a:srgbClr val="000000"/>
+              </a:solidFill>
+              <a:effectLst/>
+              <a:uFillTx/>
+              <a:latin typeface="Times New Roman"/>
+            </a:endParaRPr>
+          </a:p>
+        </p:txBody>
+      </p:sp>
+      <p:sp>
+        <p:nvSpPr>
+          <p:cNvPr id="73" name=""/>
           <p:cNvSpPr txBox="1"/>
           <p:nvPr/>
         </p:nvSpPr>
@@ -3650,13 +3736,13 @@
       </p:sp>
       <p:sp>
         <p:nvSpPr>
-          <p:cNvPr id="72" name=""/>
+          <p:cNvPr id="74" name=""/>
           <p:cNvSpPr txBox="1"/>
           <p:nvPr/>
         </p:nvSpPr>
         <p:spPr>
           <a:xfrm>
-            <a:off x="3296160" y="1870920"/>
+            <a:off x="3296160" y="1874520"/>
             <a:ext cx="159480" cy="114840"/>
           </a:xfrm>
           <a:prstGeom prst="rect">
@@ -3698,13 +3784,13 @@
       </p:sp>
       <p:sp>
         <p:nvSpPr>
-          <p:cNvPr id="73" name=""/>
+          <p:cNvPr id="75" name=""/>
           <p:cNvSpPr txBox="1"/>
           <p:nvPr/>
         </p:nvSpPr>
         <p:spPr>
           <a:xfrm>
-            <a:off x="3296160" y="1742040"/>
+            <a:off x="3296160" y="1746000"/>
             <a:ext cx="159480" cy="114840"/>
           </a:xfrm>
           <a:prstGeom prst="rect">
@@ -3746,13 +3832,13 @@
       </p:sp>
       <p:sp>
         <p:nvSpPr>
-          <p:cNvPr id="74" name=""/>
+          <p:cNvPr id="76" name=""/>
           <p:cNvSpPr txBox="1"/>
           <p:nvPr/>
         </p:nvSpPr>
         <p:spPr>
           <a:xfrm>
-            <a:off x="3296160" y="1613160"/>
+            <a:off x="3296160" y="1617120"/>
             <a:ext cx="159480" cy="114840"/>
           </a:xfrm>
           <a:prstGeom prst="rect">
@@ -3794,13 +3880,13 @@
       </p:sp>
       <p:sp>
         <p:nvSpPr>
-          <p:cNvPr id="75" name=""/>
+          <p:cNvPr id="77" name=""/>
           <p:cNvSpPr txBox="1"/>
           <p:nvPr/>
         </p:nvSpPr>
         <p:spPr>
           <a:xfrm>
-            <a:off x="3296160" y="1484280"/>
+            <a:off x="3296160" y="1488600"/>
             <a:ext cx="159480" cy="114840"/>
           </a:xfrm>
           <a:prstGeom prst="rect">
@@ -3842,7 +3928,55 @@
       </p:sp>
       <p:sp>
         <p:nvSpPr>
-          <p:cNvPr id="76" name=""/>
+          <p:cNvPr id="78" name=""/>
+          <p:cNvSpPr txBox="1"/>
+          <p:nvPr/>
+        </p:nvSpPr>
+        <p:spPr>
+          <a:xfrm>
+            <a:off x="3296160" y="1359720"/>
+            <a:ext cx="159480" cy="114840"/>
+          </a:xfrm>
+          <a:prstGeom prst="rect">
+            <a:avLst/>
+          </a:prstGeom>
+          <a:noFill/>
+          <a:ln w="0">
+            <a:noFill/>
+          </a:ln>
+        </p:spPr>
+        <p:txBody>
+          <a:bodyPr wrap="none" lIns="0" tIns="0" rIns="0" bIns="0" anchor="t">
+            <a:spAutoFit/>
+          </a:bodyPr>
+          <a:p>
+            <a:pPr/>
+            <a:r>
+              <a:rPr lang="en-US" sz="900" b="0" u="none" strike="noStrike">
+                <a:solidFill>
+                  <a:srgbClr val="000000"/>
+                </a:solidFill>
+                <a:effectLst/>
+                <a:uFillTx/>
+                <a:latin typeface="Arial"/>
+                <a:ea typeface="Arial"/>
+              </a:rPr>
+              <a:t>1.4</a:t>
+            </a:r>
+            <a:endParaRPr lang="en-US" sz="900" b="0" u="none" strike="noStrike">
+              <a:solidFill>
+                <a:srgbClr val="000000"/>
+              </a:solidFill>
+              <a:effectLst/>
+              <a:uFillTx/>
+              <a:latin typeface="Times New Roman"/>
+            </a:endParaRPr>
+          </a:p>
+        </p:txBody>
+      </p:sp>
+      <p:sp>
+        <p:nvSpPr>
+          <p:cNvPr id="79" name=""/>
           <p:cNvSpPr txBox="1"/>
           <p:nvPr/>
         </p:nvSpPr>
@@ -3890,7 +4024,7 @@
       </p:sp>
       <p:sp>
         <p:nvSpPr>
-          <p:cNvPr id="77" name=""/>
+          <p:cNvPr id="80" name=""/>
           <p:cNvSpPr txBox="1"/>
           <p:nvPr/>
         </p:nvSpPr>
@@ -3938,7 +4072,7 @@
       </p:sp>
       <p:sp>
         <p:nvSpPr>
-          <p:cNvPr id="78" name=""/>
+          <p:cNvPr id="81" name=""/>
           <p:cNvSpPr txBox="1"/>
           <p:nvPr/>
         </p:nvSpPr>
@@ -3986,7 +4120,7 @@
       </p:sp>
       <p:sp>
         <p:nvSpPr>
-          <p:cNvPr id="79" name=""/>
+          <p:cNvPr id="82" name=""/>
           <p:cNvSpPr/>
           <p:nvPr/>
         </p:nvSpPr>
@@ -4046,7 +4180,7 @@
       </p:sp>
       <p:sp>
         <p:nvSpPr>
-          <p:cNvPr id="80" name=""/>
+          <p:cNvPr id="83" name=""/>
           <p:cNvSpPr/>
           <p:nvPr/>
         </p:nvSpPr>
@@ -4109,7 +4243,7 @@
       </p:sp>
       <p:sp>
         <p:nvSpPr>
-          <p:cNvPr id="81" name=""/>
+          <p:cNvPr id="84" name=""/>
           <p:cNvSpPr/>
           <p:nvPr/>
         </p:nvSpPr>
@@ -4145,7 +4279,7 @@
             </a:pathLst>
           </a:custGeom>
           <a:solidFill>
-            <a:srgbClr val="2BA47C"/>
+            <a:srgbClr val="29A47B"/>
           </a:solidFill>
           <a:ln w="18720">
             <a:solidFill>
@@ -4172,7 +4306,7 @@
       </p:sp>
       <p:sp>
         <p:nvSpPr>
-          <p:cNvPr id="82" name=""/>
+          <p:cNvPr id="85" name=""/>
           <p:cNvSpPr/>
           <p:nvPr/>
         </p:nvSpPr>
@@ -4208,7 +4342,7 @@
             </a:pathLst>
           </a:custGeom>
           <a:solidFill>
-            <a:srgbClr val="65B897"/>
+            <a:srgbClr val="6BBB9A"/>
           </a:solidFill>
           <a:ln w="18720">
             <a:solidFill>
@@ -4235,7 +4369,7 @@
       </p:sp>
       <p:sp>
         <p:nvSpPr>
-          <p:cNvPr id="83" name=""/>
+          <p:cNvPr id="86" name=""/>
           <p:cNvSpPr/>
           <p:nvPr/>
         </p:nvSpPr>
@@ -4271,7 +4405,7 @@
             </a:pathLst>
           </a:custGeom>
           <a:solidFill>
-            <a:srgbClr val="6CBC9B"/>
+            <a:srgbClr val="72BE9F"/>
           </a:solidFill>
           <a:ln w="18720">
             <a:solidFill>
@@ -4298,7 +4432,70 @@
       </p:sp>
       <p:sp>
         <p:nvSpPr>
-          <p:cNvPr id="84" name=""/>
+          <p:cNvPr id="87" name=""/>
+          <p:cNvSpPr/>
+          <p:nvPr/>
+        </p:nvSpPr>
+        <p:spPr>
+          <a:xfrm>
+            <a:off x="5213160" y="2043720"/>
+            <a:ext cx="410760" cy="445320"/>
+          </a:xfrm>
+          <a:custGeom>
+            <a:avLst/>
+            <a:gdLst/>
+            <a:ahLst/>
+            <a:rect l="0" t="0" r="r" b="b"/>
+            <a:pathLst>
+              <a:path w="1141" h="1237">
+                <a:moveTo>
+                  <a:pt x="0" y="0"/>
+                </a:moveTo>
+                <a:lnTo>
+                  <a:pt x="1141" y="0"/>
+                </a:lnTo>
+                <a:lnTo>
+                  <a:pt x="1141" y="1237"/>
+                </a:lnTo>
+                <a:lnTo>
+                  <a:pt x="0" y="1237"/>
+                </a:lnTo>
+                <a:lnTo>
+                  <a:pt x="0" y="0"/>
+                </a:lnTo>
+                <a:close/>
+              </a:path>
+            </a:pathLst>
+          </a:custGeom>
+          <a:solidFill>
+            <a:srgbClr val="8DCAAF"/>
+          </a:solidFill>
+          <a:ln w="18720">
+            <a:solidFill>
+              <a:srgbClr val="FFFFFF"/>
+            </a:solidFill>
+            <a:miter/>
+          </a:ln>
+        </p:spPr>
+        <p:txBody>
+          <a:bodyPr lIns="9360" tIns="9360" rIns="9360" bIns="9360" anchor="t">
+            <a:noAutofit/>
+          </a:bodyPr>
+          <a:p>
+            <a:endParaRPr lang="en-US" sz="2400" b="0" u="none" strike="noStrike">
+              <a:solidFill>
+                <a:srgbClr val="000000"/>
+              </a:solidFill>
+              <a:effectLst/>
+              <a:uFillTx/>
+              <a:latin typeface="Times New Roman"/>
+            </a:endParaRPr>
+          </a:p>
+        </p:txBody>
+      </p:sp>
+      <p:sp>
+        <p:nvSpPr>
+          <p:cNvPr id="88" name=""/>
           <p:cNvSpPr/>
           <p:nvPr/>
         </p:nvSpPr>
@@ -4334,7 +4531,7 @@
             </a:pathLst>
           </a:custGeom>
           <a:solidFill>
-            <a:srgbClr val="8DCAB0"/>
+            <a:srgbClr val="91CCB2"/>
           </a:solidFill>
           <a:ln w="18720">
             <a:solidFill>
@@ -4361,13 +4558,13 @@
       </p:sp>
       <p:sp>
         <p:nvSpPr>
-          <p:cNvPr id="85" name=""/>
-          <p:cNvSpPr/>
-          <p:nvPr/>
-        </p:nvSpPr>
-        <p:spPr>
-          <a:xfrm>
-            <a:off x="5213160" y="2043720"/>
+          <p:cNvPr id="89" name=""/>
+          <p:cNvSpPr/>
+          <p:nvPr/>
+        </p:nvSpPr>
+        <p:spPr>
+          <a:xfrm>
+            <a:off x="4802760" y="2043720"/>
             <a:ext cx="410760" cy="445320"/>
           </a:xfrm>
           <a:custGeom>
@@ -4397,7 +4594,7 @@
             </a:pathLst>
           </a:custGeom>
           <a:solidFill>
-            <a:srgbClr val="98CFB7"/>
+            <a:srgbClr val="BEE1D1"/>
           </a:solidFill>
           <a:ln w="18720">
             <a:solidFill>
@@ -4424,14 +4621,14 @@
       </p:sp>
       <p:sp>
         <p:nvSpPr>
-          <p:cNvPr id="86" name=""/>
-          <p:cNvSpPr/>
-          <p:nvPr/>
-        </p:nvSpPr>
-        <p:spPr>
-          <a:xfrm>
-            <a:off x="4802760" y="2043720"/>
-            <a:ext cx="410760" cy="445320"/>
+          <p:cNvPr id="90" name=""/>
+          <p:cNvSpPr/>
+          <p:nvPr/>
+        </p:nvSpPr>
+        <p:spPr>
+          <a:xfrm>
+            <a:off x="4802760" y="1599120"/>
+            <a:ext cx="410760" cy="444960"/>
           </a:xfrm>
           <a:custGeom>
             <a:avLst/>
@@ -4439,7 +4636,7 @@
             <a:ahLst/>
             <a:rect l="0" t="0" r="r" b="b"/>
             <a:pathLst>
-              <a:path w="1141" h="1237">
+              <a:path w="1141" h="1236">
                 <a:moveTo>
                   <a:pt x="0" y="0"/>
                 </a:moveTo>
@@ -4447,10 +4644,10 @@
                   <a:pt x="1141" y="0"/>
                 </a:lnTo>
                 <a:lnTo>
-                  <a:pt x="1141" y="1237"/>
-                </a:lnTo>
-                <a:lnTo>
-                  <a:pt x="0" y="1237"/>
+                  <a:pt x="1141" y="1236"/>
+                </a:lnTo>
+                <a:lnTo>
+                  <a:pt x="0" y="1236"/>
                 </a:lnTo>
                 <a:lnTo>
                   <a:pt x="0" y="0"/>
@@ -4487,70 +4684,7 @@
       </p:sp>
       <p:sp>
         <p:nvSpPr>
-          <p:cNvPr id="87" name=""/>
-          <p:cNvSpPr/>
-          <p:nvPr/>
-        </p:nvSpPr>
-        <p:spPr>
-          <a:xfrm>
-            <a:off x="4802760" y="1599120"/>
-            <a:ext cx="410760" cy="444960"/>
-          </a:xfrm>
-          <a:custGeom>
-            <a:avLst/>
-            <a:gdLst/>
-            <a:ahLst/>
-            <a:rect l="0" t="0" r="r" b="b"/>
-            <a:pathLst>
-              <a:path w="1141" h="1236">
-                <a:moveTo>
-                  <a:pt x="0" y="0"/>
-                </a:moveTo>
-                <a:lnTo>
-                  <a:pt x="1141" y="0"/>
-                </a:lnTo>
-                <a:lnTo>
-                  <a:pt x="1141" y="1236"/>
-                </a:lnTo>
-                <a:lnTo>
-                  <a:pt x="0" y="1236"/>
-                </a:lnTo>
-                <a:lnTo>
-                  <a:pt x="0" y="0"/>
-                </a:lnTo>
-                <a:close/>
-              </a:path>
-            </a:pathLst>
-          </a:custGeom>
-          <a:solidFill>
-            <a:srgbClr val="C3E3D4"/>
-          </a:solidFill>
-          <a:ln w="18720">
-            <a:solidFill>
-              <a:srgbClr val="FFFFFF"/>
-            </a:solidFill>
-            <a:miter/>
-          </a:ln>
-        </p:spPr>
-        <p:txBody>
-          <a:bodyPr lIns="9360" tIns="9360" rIns="9360" bIns="9360" anchor="t">
-            <a:noAutofit/>
-          </a:bodyPr>
-          <a:p>
-            <a:endParaRPr lang="en-US" sz="2400" b="0" u="none" strike="noStrike">
-              <a:solidFill>
-                <a:srgbClr val="000000"/>
-              </a:solidFill>
-              <a:effectLst/>
-              <a:uFillTx/>
-              <a:latin typeface="Times New Roman"/>
-            </a:endParaRPr>
-          </a:p>
-        </p:txBody>
-      </p:sp>
-      <p:sp>
-        <p:nvSpPr>
-          <p:cNvPr id="88" name=""/>
+          <p:cNvPr id="91" name=""/>
           <p:cNvSpPr/>
           <p:nvPr/>
         </p:nvSpPr>
@@ -4613,7 +4747,7 @@
       </p:sp>
       <p:sp>
         <p:nvSpPr>
-          <p:cNvPr id="89" name=""/>
+          <p:cNvPr id="92" name=""/>
           <p:cNvSpPr/>
           <p:nvPr/>
         </p:nvSpPr>
@@ -4649,7 +4783,7 @@
             </a:pathLst>
           </a:custGeom>
           <a:solidFill>
-            <a:srgbClr val="EEF7F3"/>
+            <a:srgbClr val="F0F8F4"/>
           </a:solidFill>
           <a:ln w="18720">
             <a:solidFill>
@@ -4676,7 +4810,7 @@
       </p:sp>
       <p:sp>
         <p:nvSpPr>
-          <p:cNvPr id="90" name=""/>
+          <p:cNvPr id="93" name=""/>
           <p:cNvSpPr/>
           <p:nvPr/>
         </p:nvSpPr>
@@ -4739,7 +4873,7 @@
       </p:sp>
       <p:sp>
         <p:nvSpPr>
-          <p:cNvPr id="91" name=""/>
+          <p:cNvPr id="94" name=""/>
           <p:cNvSpPr/>
           <p:nvPr/>
         </p:nvSpPr>
@@ -4775,7 +4909,7 @@
             </a:pathLst>
           </a:custGeom>
           <a:solidFill>
-            <a:srgbClr val="F5FAF8"/>
+            <a:srgbClr val="F6FBF8"/>
           </a:solidFill>
           <a:ln w="18720">
             <a:solidFill>
@@ -4802,7 +4936,7 @@
       </p:sp>
       <p:sp>
         <p:nvSpPr>
-          <p:cNvPr id="92" name=""/>
+          <p:cNvPr id="95" name=""/>
           <p:cNvSpPr/>
           <p:nvPr/>
         </p:nvSpPr>
@@ -4838,7 +4972,7 @@
             </a:pathLst>
           </a:custGeom>
           <a:solidFill>
-            <a:srgbClr val="F6FBF9"/>
+            <a:srgbClr val="F8FCFA"/>
           </a:solidFill>
           <a:ln w="18720">
             <a:solidFill>
@@ -4865,7 +4999,7 @@
       </p:sp>
       <p:sp>
         <p:nvSpPr>
-          <p:cNvPr id="93" name=""/>
+          <p:cNvPr id="96" name=""/>
           <p:cNvSpPr/>
           <p:nvPr/>
         </p:nvSpPr>
@@ -4928,7 +5062,7 @@
       </p:sp>
       <p:sp>
         <p:nvSpPr>
-          <p:cNvPr id="94" name=""/>
+          <p:cNvPr id="97" name=""/>
           <p:cNvSpPr/>
           <p:nvPr/>
         </p:nvSpPr>
@@ -4991,7 +5125,7 @@
       </p:sp>
       <p:sp>
         <p:nvSpPr>
-          <p:cNvPr id="95" name=""/>
+          <p:cNvPr id="98" name=""/>
           <p:cNvSpPr/>
           <p:nvPr/>
         </p:nvSpPr>
@@ -5054,7 +5188,7 @@
       </p:sp>
       <p:sp>
         <p:nvSpPr>
-          <p:cNvPr id="96" name=""/>
+          <p:cNvPr id="99" name=""/>
           <p:cNvSpPr txBox="1"/>
           <p:nvPr/>
         </p:nvSpPr>
@@ -5102,7 +5236,7 @@
       </p:sp>
       <p:sp>
         <p:nvSpPr>
-          <p:cNvPr id="97" name=""/>
+          <p:cNvPr id="100" name=""/>
           <p:cNvSpPr txBox="1"/>
           <p:nvPr/>
         </p:nvSpPr>
@@ -5150,7 +5284,7 @@
       </p:sp>
       <p:sp>
         <p:nvSpPr>
-          <p:cNvPr id="98" name=""/>
+          <p:cNvPr id="101" name=""/>
           <p:cNvSpPr txBox="1"/>
           <p:nvPr/>
         </p:nvSpPr>
@@ -5198,61 +5332,13 @@
       </p:sp>
       <p:sp>
         <p:nvSpPr>
-          <p:cNvPr id="99" name=""/>
+          <p:cNvPr id="102" name=""/>
           <p:cNvSpPr txBox="1"/>
           <p:nvPr/>
         </p:nvSpPr>
         <p:spPr>
           <a:xfrm>
-            <a:off x="5797080" y="1770840"/>
-            <a:ext cx="102600" cy="104040"/>
-          </a:xfrm>
-          <a:prstGeom prst="rect">
-            <a:avLst/>
-          </a:prstGeom>
-          <a:noFill/>
-          <a:ln w="0">
-            <a:noFill/>
-          </a:ln>
-        </p:spPr>
-        <p:txBody>
-          <a:bodyPr wrap="none" lIns="0" tIns="0" rIns="0" bIns="0" anchor="t">
-            <a:spAutoFit/>
-          </a:bodyPr>
-          <a:p>
-            <a:pPr/>
-            <a:r>
-              <a:rPr lang="en-US" sz="810" b="0" u="none" strike="noStrike">
-                <a:solidFill>
-                  <a:srgbClr val="1A1A1A"/>
-                </a:solidFill>
-                <a:effectLst/>
-                <a:uFillTx/>
-                <a:latin typeface="Arial"/>
-                <a:ea typeface="Arial"/>
-              </a:rPr>
-              <a:t>9</a:t>
-            </a:r>
-            <a:endParaRPr lang="en-US" sz="810" b="0" u="none" strike="noStrike">
-              <a:solidFill>
-                <a:srgbClr val="000000"/>
-              </a:solidFill>
-              <a:effectLst/>
-              <a:uFillTx/>
-              <a:latin typeface="Times New Roman"/>
-            </a:endParaRPr>
-          </a:p>
-        </p:txBody>
-      </p:sp>
-      <p:sp>
-        <p:nvSpPr>
-          <p:cNvPr id="100" name=""/>
-          <p:cNvSpPr txBox="1"/>
-          <p:nvPr/>
-        </p:nvSpPr>
-        <p:spPr>
-          <a:xfrm>
-            <a:off x="6175800" y="1770840"/>
+            <a:off x="5765400" y="1770840"/>
             <a:ext cx="115920" cy="104040"/>
           </a:xfrm>
           <a:prstGeom prst="rect">
@@ -5294,13 +5380,13 @@
       </p:sp>
       <p:sp>
         <p:nvSpPr>
-          <p:cNvPr id="101" name=""/>
+          <p:cNvPr id="103" name=""/>
           <p:cNvSpPr txBox="1"/>
           <p:nvPr/>
         </p:nvSpPr>
         <p:spPr>
           <a:xfrm>
-            <a:off x="5355000" y="1770840"/>
+            <a:off x="6188760" y="1770840"/>
             <a:ext cx="115920" cy="104040"/>
           </a:xfrm>
           <a:prstGeom prst="rect">
@@ -5327,7 +5413,7 @@
                 <a:latin typeface="Arial"/>
                 <a:ea typeface="Arial"/>
               </a:rPr>
-              <a:t>15</a:t>
+              <a:t>11</a:t>
             </a:r>
             <a:endParaRPr lang="en-US" sz="810" b="0" u="none" strike="noStrike">
               <a:solidFill>
@@ -5342,7 +5428,7 @@
       </p:sp>
       <p:sp>
         <p:nvSpPr>
-          <p:cNvPr id="102" name=""/>
+          <p:cNvPr id="104" name=""/>
           <p:cNvSpPr txBox="1"/>
           <p:nvPr/>
         </p:nvSpPr>
@@ -5375,7 +5461,7 @@
                 <a:latin typeface="Arial"/>
                 <a:ea typeface="Arial"/>
               </a:rPr>
-              <a:t>17</a:t>
+              <a:t>16</a:t>
             </a:r>
             <a:endParaRPr lang="en-US" sz="810" b="0" u="none" strike="noStrike">
               <a:solidFill>
@@ -5390,7 +5476,55 @@
       </p:sp>
       <p:sp>
         <p:nvSpPr>
-          <p:cNvPr id="103" name=""/>
+          <p:cNvPr id="105" name=""/>
+          <p:cNvSpPr txBox="1"/>
+          <p:nvPr/>
+        </p:nvSpPr>
+        <p:spPr>
+          <a:xfrm>
+            <a:off x="5355000" y="1770840"/>
+            <a:ext cx="115920" cy="104040"/>
+          </a:xfrm>
+          <a:prstGeom prst="rect">
+            <a:avLst/>
+          </a:prstGeom>
+          <a:noFill/>
+          <a:ln w="0">
+            <a:noFill/>
+          </a:ln>
+        </p:spPr>
+        <p:txBody>
+          <a:bodyPr wrap="none" lIns="0" tIns="0" rIns="0" bIns="0" anchor="t">
+            <a:spAutoFit/>
+          </a:bodyPr>
+          <a:p>
+            <a:pPr/>
+            <a:r>
+              <a:rPr lang="en-US" sz="810" b="0" u="none" strike="noStrike">
+                <a:solidFill>
+                  <a:srgbClr val="1A1A1A"/>
+                </a:solidFill>
+                <a:effectLst/>
+                <a:uFillTx/>
+                <a:latin typeface="Arial"/>
+                <a:ea typeface="Arial"/>
+              </a:rPr>
+              <a:t>16</a:t>
+            </a:r>
+            <a:endParaRPr lang="en-US" sz="810" b="0" u="none" strike="noStrike">
+              <a:solidFill>
+                <a:srgbClr val="000000"/>
+              </a:solidFill>
+              <a:effectLst/>
+              <a:uFillTx/>
+              <a:latin typeface="Times New Roman"/>
+            </a:endParaRPr>
+          </a:p>
+        </p:txBody>
+      </p:sp>
+      <p:sp>
+        <p:nvSpPr>
+          <p:cNvPr id="106" name=""/>
           <p:cNvSpPr txBox="1"/>
           <p:nvPr/>
         </p:nvSpPr>
@@ -5438,7 +5572,7 @@
       </p:sp>
       <p:sp>
         <p:nvSpPr>
-          <p:cNvPr id="104" name=""/>
+          <p:cNvPr id="107" name=""/>
           <p:cNvSpPr txBox="1"/>
           <p:nvPr/>
         </p:nvSpPr>
@@ -5471,7 +5605,7 @@
                 <a:latin typeface="Arial"/>
                 <a:ea typeface="Arial"/>
               </a:rPr>
-              <a:t>24</a:t>
+              <a:t>25</a:t>
             </a:r>
             <a:endParaRPr lang="en-US" sz="810" b="0" u="none" strike="noStrike">
               <a:solidFill>
@@ -5486,109 +5620,13 @@
       </p:sp>
       <p:sp>
         <p:nvSpPr>
-          <p:cNvPr id="105" name=""/>
+          <p:cNvPr id="108" name=""/>
           <p:cNvSpPr txBox="1"/>
           <p:nvPr/>
         </p:nvSpPr>
         <p:spPr>
           <a:xfrm>
             <a:off x="5765400" y="1325880"/>
-            <a:ext cx="115920" cy="104040"/>
-          </a:xfrm>
-          <a:prstGeom prst="rect">
-            <a:avLst/>
-          </a:prstGeom>
-          <a:noFill/>
-          <a:ln w="0">
-            <a:noFill/>
-          </a:ln>
-        </p:spPr>
-        <p:txBody>
-          <a:bodyPr wrap="none" lIns="0" tIns="0" rIns="0" bIns="0" anchor="t">
-            <a:spAutoFit/>
-          </a:bodyPr>
-          <a:p>
-            <a:pPr/>
-            <a:r>
-              <a:rPr lang="en-US" sz="810" b="0" u="none" strike="noStrike">
-                <a:solidFill>
-                  <a:srgbClr val="1A1A1A"/>
-                </a:solidFill>
-                <a:effectLst/>
-                <a:uFillTx/>
-                <a:latin typeface="Arial"/>
-                <a:ea typeface="Arial"/>
-              </a:rPr>
-              <a:t>31</a:t>
-            </a:r>
-            <a:endParaRPr lang="en-US" sz="810" b="0" u="none" strike="noStrike">
-              <a:solidFill>
-                <a:srgbClr val="000000"/>
-              </a:solidFill>
-              <a:effectLst/>
-              <a:uFillTx/>
-              <a:latin typeface="Times New Roman"/>
-            </a:endParaRPr>
-          </a:p>
-        </p:txBody>
-      </p:sp>
-      <p:sp>
-        <p:nvSpPr>
-          <p:cNvPr id="106" name=""/>
-          <p:cNvSpPr txBox="1"/>
-          <p:nvPr/>
-        </p:nvSpPr>
-        <p:spPr>
-          <a:xfrm>
-            <a:off x="5355000" y="1325880"/>
-            <a:ext cx="115920" cy="104040"/>
-          </a:xfrm>
-          <a:prstGeom prst="rect">
-            <a:avLst/>
-          </a:prstGeom>
-          <a:noFill/>
-          <a:ln w="0">
-            <a:noFill/>
-          </a:ln>
-        </p:spPr>
-        <p:txBody>
-          <a:bodyPr wrap="none" lIns="0" tIns="0" rIns="0" bIns="0" anchor="t">
-            <a:spAutoFit/>
-          </a:bodyPr>
-          <a:p>
-            <a:pPr/>
-            <a:r>
-              <a:rPr lang="en-US" sz="810" b="0" u="none" strike="noStrike">
-                <a:solidFill>
-                  <a:srgbClr val="1A1A1A"/>
-                </a:solidFill>
-                <a:effectLst/>
-                <a:uFillTx/>
-                <a:latin typeface="Arial"/>
-                <a:ea typeface="Arial"/>
-              </a:rPr>
-              <a:t>31</a:t>
-            </a:r>
-            <a:endParaRPr lang="en-US" sz="810" b="0" u="none" strike="noStrike">
-              <a:solidFill>
-                <a:srgbClr val="000000"/>
-              </a:solidFill>
-              <a:effectLst/>
-              <a:uFillTx/>
-              <a:latin typeface="Times New Roman"/>
-            </a:endParaRPr>
-          </a:p>
-        </p:txBody>
-      </p:sp>
-      <p:sp>
-        <p:nvSpPr>
-          <p:cNvPr id="107" name=""/>
-          <p:cNvSpPr txBox="1"/>
-          <p:nvPr/>
-        </p:nvSpPr>
-        <p:spPr>
-          <a:xfrm>
-            <a:off x="6175800" y="1325880"/>
             <a:ext cx="115920" cy="104040"/>
           </a:xfrm>
           <a:prstGeom prst="rect">
@@ -5630,109 +5668,13 @@
       </p:sp>
       <p:sp>
         <p:nvSpPr>
-          <p:cNvPr id="108" name=""/>
-          <p:cNvSpPr txBox="1"/>
-          <p:nvPr/>
-        </p:nvSpPr>
-        <p:spPr>
-          <a:xfrm>
-            <a:off x="4944600" y="1325880"/>
-            <a:ext cx="115920" cy="104040"/>
-          </a:xfrm>
-          <a:prstGeom prst="rect">
-            <a:avLst/>
-          </a:prstGeom>
-          <a:noFill/>
-          <a:ln w="0">
-            <a:noFill/>
-          </a:ln>
-        </p:spPr>
-        <p:txBody>
-          <a:bodyPr wrap="none" lIns="0" tIns="0" rIns="0" bIns="0" anchor="t">
-            <a:spAutoFit/>
-          </a:bodyPr>
-          <a:p>
-            <a:pPr/>
-            <a:r>
-              <a:rPr lang="en-US" sz="810" b="0" u="none" strike="noStrike">
-                <a:solidFill>
-                  <a:srgbClr val="1A1A1A"/>
-                </a:solidFill>
-                <a:effectLst/>
-                <a:uFillTx/>
-                <a:latin typeface="Arial"/>
-                <a:ea typeface="Arial"/>
-              </a:rPr>
-              <a:t>32</a:t>
-            </a:r>
-            <a:endParaRPr lang="en-US" sz="810" b="0" u="none" strike="noStrike">
-              <a:solidFill>
-                <a:srgbClr val="000000"/>
-              </a:solidFill>
-              <a:effectLst/>
-              <a:uFillTx/>
-              <a:latin typeface="Times New Roman"/>
-            </a:endParaRPr>
-          </a:p>
-        </p:txBody>
-      </p:sp>
-      <p:sp>
-        <p:nvSpPr>
           <p:cNvPr id="109" name=""/>
           <p:cNvSpPr txBox="1"/>
           <p:nvPr/>
         </p:nvSpPr>
         <p:spPr>
           <a:xfrm>
-            <a:off x="5355000" y="880920"/>
-            <a:ext cx="115920" cy="104040"/>
-          </a:xfrm>
-          <a:prstGeom prst="rect">
-            <a:avLst/>
-          </a:prstGeom>
-          <a:noFill/>
-          <a:ln w="0">
-            <a:noFill/>
-          </a:ln>
-        </p:spPr>
-        <p:txBody>
-          <a:bodyPr wrap="none" lIns="0" tIns="0" rIns="0" bIns="0" anchor="t">
-            <a:spAutoFit/>
-          </a:bodyPr>
-          <a:p>
-            <a:pPr/>
-            <a:r>
-              <a:rPr lang="en-US" sz="810" b="0" u="none" strike="noStrike">
-                <a:solidFill>
-                  <a:srgbClr val="1A1A1A"/>
-                </a:solidFill>
-                <a:effectLst/>
-                <a:uFillTx/>
-                <a:latin typeface="Arial"/>
-                <a:ea typeface="Arial"/>
-              </a:rPr>
-              <a:t>32</a:t>
-            </a:r>
-            <a:endParaRPr lang="en-US" sz="810" b="0" u="none" strike="noStrike">
-              <a:solidFill>
-                <a:srgbClr val="000000"/>
-              </a:solidFill>
-              <a:effectLst/>
-              <a:uFillTx/>
-              <a:latin typeface="Times New Roman"/>
-            </a:endParaRPr>
-          </a:p>
-        </p:txBody>
-      </p:sp>
-      <p:sp>
-        <p:nvSpPr>
-          <p:cNvPr id="110" name=""/>
-          <p:cNvSpPr txBox="1"/>
-          <p:nvPr/>
-        </p:nvSpPr>
-        <p:spPr>
-          <a:xfrm>
-            <a:off x="6175800" y="880920"/>
+            <a:off x="5355000" y="1325880"/>
             <a:ext cx="115920" cy="104040"/>
           </a:xfrm>
           <a:prstGeom prst="rect">
@@ -5774,13 +5716,61 @@
       </p:sp>
       <p:sp>
         <p:nvSpPr>
+          <p:cNvPr id="110" name=""/>
+          <p:cNvSpPr txBox="1"/>
+          <p:nvPr/>
+        </p:nvSpPr>
+        <p:spPr>
+          <a:xfrm>
+            <a:off x="6175800" y="1325880"/>
+            <a:ext cx="115920" cy="104040"/>
+          </a:xfrm>
+          <a:prstGeom prst="rect">
+            <a:avLst/>
+          </a:prstGeom>
+          <a:noFill/>
+          <a:ln w="0">
+            <a:noFill/>
+          </a:ln>
+        </p:spPr>
+        <p:txBody>
+          <a:bodyPr wrap="none" lIns="0" tIns="0" rIns="0" bIns="0" anchor="t">
+            <a:spAutoFit/>
+          </a:bodyPr>
+          <a:p>
+            <a:pPr/>
+            <a:r>
+              <a:rPr lang="en-US" sz="810" b="0" u="none" strike="noStrike">
+                <a:solidFill>
+                  <a:srgbClr val="1A1A1A"/>
+                </a:solidFill>
+                <a:effectLst/>
+                <a:uFillTx/>
+                <a:latin typeface="Arial"/>
+                <a:ea typeface="Arial"/>
+              </a:rPr>
+              <a:t>33</a:t>
+            </a:r>
+            <a:endParaRPr lang="en-US" sz="810" b="0" u="none" strike="noStrike">
+              <a:solidFill>
+                <a:srgbClr val="000000"/>
+              </a:solidFill>
+              <a:effectLst/>
+              <a:uFillTx/>
+              <a:latin typeface="Times New Roman"/>
+            </a:endParaRPr>
+          </a:p>
+        </p:txBody>
+      </p:sp>
+      <p:sp>
+        <p:nvSpPr>
           <p:cNvPr id="111" name=""/>
           <p:cNvSpPr txBox="1"/>
           <p:nvPr/>
         </p:nvSpPr>
         <p:spPr>
           <a:xfrm>
-            <a:off x="5765400" y="880920"/>
+            <a:off x="4944600" y="1325880"/>
             <a:ext cx="115920" cy="104040"/>
           </a:xfrm>
           <a:prstGeom prst="rect">
@@ -5823,55 +5813,12 @@
       <p:sp>
         <p:nvSpPr>
           <p:cNvPr id="112" name=""/>
-          <p:cNvSpPr/>
-          <p:nvPr/>
-        </p:nvSpPr>
-        <p:spPr>
-          <a:xfrm flipV="1">
-            <a:off x="4761720" y="664560"/>
-            <a:ext cx="0" cy="1868760"/>
-          </a:xfrm>
-          <a:prstGeom prst="line">
-            <a:avLst/>
-          </a:prstGeom>
-          <a:ln cap="sq" w="9360">
-            <a:solidFill>
-              <a:srgbClr val="333333"/>
-            </a:solidFill>
-            <a:round/>
-          </a:ln>
-        </p:spPr>
-        <p:style>
-          <a:lnRef idx="0"/>
-          <a:fillRef idx="0"/>
-          <a:effectRef idx="0"/>
-          <a:fontRef idx="minor"/>
-        </p:style>
-        <p:txBody>
-          <a:bodyPr lIns="4680" tIns="4680" rIns="4680" bIns="4680" anchor="t">
-            <a:noAutofit/>
-          </a:bodyPr>
-          <a:p>
-            <a:endParaRPr lang="en-US" sz="2400" b="0" u="none" strike="noStrike">
-              <a:solidFill>
-                <a:srgbClr val="000000"/>
-              </a:solidFill>
-              <a:effectLst/>
-              <a:uFillTx/>
-              <a:latin typeface="Times New Roman"/>
-            </a:endParaRPr>
-          </a:p>
-        </p:txBody>
-      </p:sp>
-      <p:sp>
-        <p:nvSpPr>
-          <p:cNvPr id="113" name=""/>
           <p:cNvSpPr txBox="1"/>
           <p:nvPr/>
         </p:nvSpPr>
         <p:spPr>
           <a:xfrm>
-            <a:off x="4944600" y="880920"/>
+            <a:off x="5355000" y="880920"/>
             <a:ext cx="115920" cy="104040"/>
           </a:xfrm>
           <a:prstGeom prst="rect">
@@ -5913,7 +5860,194 @@
       </p:sp>
       <p:sp>
         <p:nvSpPr>
+          <p:cNvPr id="113" name=""/>
+          <p:cNvSpPr txBox="1"/>
+          <p:nvPr/>
+        </p:nvSpPr>
+        <p:spPr>
+          <a:xfrm>
+            <a:off x="6175800" y="880920"/>
+            <a:ext cx="115920" cy="104040"/>
+          </a:xfrm>
+          <a:prstGeom prst="rect">
+            <a:avLst/>
+          </a:prstGeom>
+          <a:noFill/>
+          <a:ln w="0">
+            <a:noFill/>
+          </a:ln>
+        </p:spPr>
+        <p:txBody>
+          <a:bodyPr wrap="none" lIns="0" tIns="0" rIns="0" bIns="0" anchor="t">
+            <a:spAutoFit/>
+          </a:bodyPr>
+          <a:p>
+            <a:pPr/>
+            <a:r>
+              <a:rPr lang="en-US" sz="810" b="0" u="none" strike="noStrike">
+                <a:solidFill>
+                  <a:srgbClr val="1A1A1A"/>
+                </a:solidFill>
+                <a:effectLst/>
+                <a:uFillTx/>
+                <a:latin typeface="Arial"/>
+                <a:ea typeface="Arial"/>
+              </a:rPr>
+              <a:t>35</a:t>
+            </a:r>
+            <a:endParaRPr lang="en-US" sz="810" b="0" u="none" strike="noStrike">
+              <a:solidFill>
+                <a:srgbClr val="000000"/>
+              </a:solidFill>
+              <a:effectLst/>
+              <a:uFillTx/>
+              <a:latin typeface="Times New Roman"/>
+            </a:endParaRPr>
+          </a:p>
+        </p:txBody>
+      </p:sp>
+      <p:sp>
+        <p:nvSpPr>
           <p:cNvPr id="114" name=""/>
+          <p:cNvSpPr txBox="1"/>
+          <p:nvPr/>
+        </p:nvSpPr>
+        <p:spPr>
+          <a:xfrm>
+            <a:off x="5765400" y="880920"/>
+            <a:ext cx="115920" cy="104040"/>
+          </a:xfrm>
+          <a:prstGeom prst="rect">
+            <a:avLst/>
+          </a:prstGeom>
+          <a:noFill/>
+          <a:ln w="0">
+            <a:noFill/>
+          </a:ln>
+        </p:spPr>
+        <p:txBody>
+          <a:bodyPr wrap="none" lIns="0" tIns="0" rIns="0" bIns="0" anchor="t">
+            <a:spAutoFit/>
+          </a:bodyPr>
+          <a:p>
+            <a:pPr/>
+            <a:r>
+              <a:rPr lang="en-US" sz="810" b="0" u="none" strike="noStrike">
+                <a:solidFill>
+                  <a:srgbClr val="1A1A1A"/>
+                </a:solidFill>
+                <a:effectLst/>
+                <a:uFillTx/>
+                <a:latin typeface="Arial"/>
+                <a:ea typeface="Arial"/>
+              </a:rPr>
+              <a:t>35</a:t>
+            </a:r>
+            <a:endParaRPr lang="en-US" sz="810" b="0" u="none" strike="noStrike">
+              <a:solidFill>
+                <a:srgbClr val="000000"/>
+              </a:solidFill>
+              <a:effectLst/>
+              <a:uFillTx/>
+              <a:latin typeface="Times New Roman"/>
+            </a:endParaRPr>
+          </a:p>
+        </p:txBody>
+      </p:sp>
+      <p:sp>
+        <p:nvSpPr>
+          <p:cNvPr id="115" name=""/>
+          <p:cNvSpPr/>
+          <p:nvPr/>
+        </p:nvSpPr>
+        <p:spPr>
+          <a:xfrm flipV="1">
+            <a:off x="4761720" y="664560"/>
+            <a:ext cx="0" cy="1868760"/>
+          </a:xfrm>
+          <a:prstGeom prst="line">
+            <a:avLst/>
+          </a:prstGeom>
+          <a:ln cap="sq" w="9360">
+            <a:solidFill>
+              <a:srgbClr val="333333"/>
+            </a:solidFill>
+            <a:round/>
+          </a:ln>
+        </p:spPr>
+        <p:style>
+          <a:lnRef idx="0"/>
+          <a:fillRef idx="0"/>
+          <a:effectRef idx="0"/>
+          <a:fontRef idx="minor"/>
+        </p:style>
+        <p:txBody>
+          <a:bodyPr lIns="4680" tIns="4680" rIns="4680" bIns="4680" anchor="t">
+            <a:noAutofit/>
+          </a:bodyPr>
+          <a:p>
+            <a:endParaRPr lang="en-US" sz="2400" b="0" u="none" strike="noStrike">
+              <a:solidFill>
+                <a:srgbClr val="000000"/>
+              </a:solidFill>
+              <a:effectLst/>
+              <a:uFillTx/>
+              <a:latin typeface="Times New Roman"/>
+            </a:endParaRPr>
+          </a:p>
+        </p:txBody>
+      </p:sp>
+      <p:sp>
+        <p:nvSpPr>
+          <p:cNvPr id="116" name=""/>
+          <p:cNvSpPr txBox="1"/>
+          <p:nvPr/>
+        </p:nvSpPr>
+        <p:spPr>
+          <a:xfrm>
+            <a:off x="4944600" y="880920"/>
+            <a:ext cx="115920" cy="104040"/>
+          </a:xfrm>
+          <a:prstGeom prst="rect">
+            <a:avLst/>
+          </a:prstGeom>
+          <a:noFill/>
+          <a:ln w="0">
+            <a:noFill/>
+          </a:ln>
+        </p:spPr>
+        <p:txBody>
+          <a:bodyPr wrap="none" lIns="0" tIns="0" rIns="0" bIns="0" anchor="t">
+            <a:spAutoFit/>
+          </a:bodyPr>
+          <a:p>
+            <a:pPr/>
+            <a:r>
+              <a:rPr lang="en-US" sz="810" b="0" u="none" strike="noStrike">
+                <a:solidFill>
+                  <a:srgbClr val="1A1A1A"/>
+                </a:solidFill>
+                <a:effectLst/>
+                <a:uFillTx/>
+                <a:latin typeface="Arial"/>
+                <a:ea typeface="Arial"/>
+              </a:rPr>
+              <a:t>35</a:t>
+            </a:r>
+            <a:endParaRPr lang="en-US" sz="810" b="0" u="none" strike="noStrike">
+              <a:solidFill>
+                <a:srgbClr val="000000"/>
+              </a:solidFill>
+              <a:effectLst/>
+              <a:uFillTx/>
+              <a:latin typeface="Times New Roman"/>
+            </a:endParaRPr>
+          </a:p>
+        </p:txBody>
+      </p:sp>
+      <p:sp>
+        <p:nvSpPr>
+          <p:cNvPr id="117" name=""/>
           <p:cNvSpPr txBox="1"/>
           <p:nvPr/>
         </p:nvSpPr>
@@ -5961,7 +6095,7 @@
       </p:sp>
       <p:sp>
         <p:nvSpPr>
-          <p:cNvPr id="115" name=""/>
+          <p:cNvPr id="118" name=""/>
           <p:cNvSpPr txBox="1"/>
           <p:nvPr/>
         </p:nvSpPr>
@@ -6009,7 +6143,7 @@
       </p:sp>
       <p:sp>
         <p:nvSpPr>
-          <p:cNvPr id="116" name=""/>
+          <p:cNvPr id="119" name=""/>
           <p:cNvSpPr txBox="1"/>
           <p:nvPr/>
         </p:nvSpPr>
@@ -6057,7 +6191,7 @@
       </p:sp>
       <p:sp>
         <p:nvSpPr>
-          <p:cNvPr id="117" name=""/>
+          <p:cNvPr id="120" name=""/>
           <p:cNvSpPr/>
           <p:nvPr/>
         </p:nvSpPr>
@@ -6100,7 +6234,7 @@
       </p:sp>
       <p:sp>
         <p:nvSpPr>
-          <p:cNvPr id="118" name=""/>
+          <p:cNvPr id="121" name=""/>
           <p:cNvSpPr/>
           <p:nvPr/>
         </p:nvSpPr>
@@ -6143,7 +6277,7 @@
       </p:sp>
       <p:sp>
         <p:nvSpPr>
-          <p:cNvPr id="119" name=""/>
+          <p:cNvPr id="122" name=""/>
           <p:cNvSpPr/>
           <p:nvPr/>
         </p:nvSpPr>
@@ -6186,7 +6320,7 @@
       </p:sp>
       <p:sp>
         <p:nvSpPr>
-          <p:cNvPr id="120" name=""/>
+          <p:cNvPr id="123" name=""/>
           <p:cNvSpPr/>
           <p:nvPr/>
         </p:nvSpPr>
@@ -6229,7 +6363,7 @@
       </p:sp>
       <p:sp>
         <p:nvSpPr>
-          <p:cNvPr id="121" name=""/>
+          <p:cNvPr id="124" name=""/>
           <p:cNvSpPr/>
           <p:nvPr/>
         </p:nvSpPr>
@@ -6272,7 +6406,7 @@
       </p:sp>
       <p:sp>
         <p:nvSpPr>
-          <p:cNvPr id="122" name=""/>
+          <p:cNvPr id="125" name=""/>
           <p:cNvSpPr/>
           <p:nvPr/>
         </p:nvSpPr>
@@ -6315,7 +6449,7 @@
       </p:sp>
       <p:sp>
         <p:nvSpPr>
-          <p:cNvPr id="123" name=""/>
+          <p:cNvPr id="126" name=""/>
           <p:cNvSpPr/>
           <p:nvPr/>
         </p:nvSpPr>
@@ -6358,7 +6492,7 @@
       </p:sp>
       <p:sp>
         <p:nvSpPr>
-          <p:cNvPr id="124" name=""/>
+          <p:cNvPr id="127" name=""/>
           <p:cNvSpPr/>
           <p:nvPr/>
         </p:nvSpPr>
@@ -6401,7 +6535,7 @@
       </p:sp>
       <p:sp>
         <p:nvSpPr>
-          <p:cNvPr id="125" name=""/>
+          <p:cNvPr id="128" name=""/>
           <p:cNvSpPr/>
           <p:nvPr/>
         </p:nvSpPr>
@@ -6444,7 +6578,7 @@
       </p:sp>
       <p:sp>
         <p:nvSpPr>
-          <p:cNvPr id="126" name=""/>
+          <p:cNvPr id="129" name=""/>
           <p:cNvSpPr txBox="1"/>
           <p:nvPr/>
         </p:nvSpPr>
@@ -6492,7 +6626,7 @@
       </p:sp>
       <p:sp>
         <p:nvSpPr>
-          <p:cNvPr id="127" name=""/>
+          <p:cNvPr id="130" name=""/>
           <p:cNvSpPr txBox="1"/>
           <p:nvPr/>
         </p:nvSpPr>
@@ -6540,7 +6674,7 @@
       </p:sp>
       <p:sp>
         <p:nvSpPr>
-          <p:cNvPr id="128" name=""/>
+          <p:cNvPr id="131" name=""/>
           <p:cNvSpPr txBox="1"/>
           <p:nvPr/>
         </p:nvSpPr>
@@ -6588,7 +6722,7 @@
       </p:sp>
       <p:sp>
         <p:nvSpPr>
-          <p:cNvPr id="129" name=""/>
+          <p:cNvPr id="132" name=""/>
           <p:cNvSpPr txBox="1"/>
           <p:nvPr/>
         </p:nvSpPr>
@@ -6636,7 +6770,7 @@
       </p:sp>
       <p:sp>
         <p:nvSpPr>
-          <p:cNvPr id="130" name=""/>
+          <p:cNvPr id="133" name=""/>
           <p:cNvSpPr txBox="1"/>
           <p:nvPr/>
         </p:nvSpPr>
@@ -6684,7 +6818,7 @@
       </p:sp>
       <p:sp>
         <p:nvSpPr>
-          <p:cNvPr id="131" name=""/>
+          <p:cNvPr id="134" name=""/>
           <p:cNvSpPr/>
           <p:nvPr/>
         </p:nvSpPr>
@@ -6744,7 +6878,7 @@
       </p:sp>
       <p:sp>
         <p:nvSpPr>
-          <p:cNvPr id="132" name=""/>
+          <p:cNvPr id="135" name=""/>
           <p:cNvSpPr txBox="1"/>
           <p:nvPr/>
         </p:nvSpPr>
@@ -6792,7 +6926,7 @@
       </p:sp>
       <p:pic>
         <p:nvPicPr>
-          <p:cNvPr id="133" name=""/>
+          <p:cNvPr id="136" name=""/>
           <p:cNvPicPr/>
           <p:nvPr/>
         </p:nvPicPr>
@@ -6817,7 +6951,7 @@
       </p:pic>
       <p:sp>
         <p:nvSpPr>
-          <p:cNvPr id="134" name=""/>
+          <p:cNvPr id="137" name=""/>
           <p:cNvSpPr/>
           <p:nvPr/>
         </p:nvSpPr>
@@ -6860,13 +6994,13 @@
       </p:sp>
       <p:sp>
         <p:nvSpPr>
-          <p:cNvPr id="135" name=""/>
-          <p:cNvSpPr/>
-          <p:nvPr/>
-        </p:nvSpPr>
-        <p:spPr>
-          <a:xfrm>
-            <a:off x="7166160" y="1802880"/>
+          <p:cNvPr id="138" name=""/>
+          <p:cNvSpPr/>
+          <p:nvPr/>
+        </p:nvSpPr>
+        <p:spPr>
+          <a:xfrm>
+            <a:off x="7166160" y="1809720"/>
             <a:ext cx="22680" cy="0"/>
           </a:xfrm>
           <a:prstGeom prst="line">
@@ -6903,13 +7037,13 @@
       </p:sp>
       <p:sp>
         <p:nvSpPr>
-          <p:cNvPr id="136" name=""/>
-          <p:cNvSpPr/>
-          <p:nvPr/>
-        </p:nvSpPr>
-        <p:spPr>
-          <a:xfrm>
-            <a:off x="7166160" y="1634400"/>
+          <p:cNvPr id="139" name=""/>
+          <p:cNvSpPr/>
+          <p:nvPr/>
+        </p:nvSpPr>
+        <p:spPr>
+          <a:xfrm>
+            <a:off x="7166160" y="1647720"/>
             <a:ext cx="22680" cy="0"/>
           </a:xfrm>
           <a:prstGeom prst="line">
@@ -6946,13 +7080,13 @@
       </p:sp>
       <p:sp>
         <p:nvSpPr>
-          <p:cNvPr id="137" name=""/>
-          <p:cNvSpPr/>
-          <p:nvPr/>
-        </p:nvSpPr>
-        <p:spPr>
-          <a:xfrm>
-            <a:off x="7166160" y="1465920"/>
+          <p:cNvPr id="140" name=""/>
+          <p:cNvSpPr/>
+          <p:nvPr/>
+        </p:nvSpPr>
+        <p:spPr>
+          <a:xfrm>
+            <a:off x="7166160" y="1486080"/>
             <a:ext cx="22680" cy="0"/>
           </a:xfrm>
           <a:prstGeom prst="line">
@@ -6989,7 +7123,7 @@
       </p:sp>
       <p:sp>
         <p:nvSpPr>
-          <p:cNvPr id="138" name=""/>
+          <p:cNvPr id="141" name=""/>
           <p:cNvSpPr/>
           <p:nvPr/>
         </p:nvSpPr>
@@ -7032,13 +7166,13 @@
       </p:sp>
       <p:sp>
         <p:nvSpPr>
-          <p:cNvPr id="139" name=""/>
+          <p:cNvPr id="142" name=""/>
           <p:cNvSpPr/>
           <p:nvPr/>
         </p:nvSpPr>
         <p:spPr>
           <a:xfrm flipH="1">
-            <a:off x="7075080" y="1802880"/>
+            <a:off x="7075080" y="1809720"/>
             <a:ext cx="22680" cy="0"/>
           </a:xfrm>
           <a:prstGeom prst="line">
@@ -7075,13 +7209,13 @@
       </p:sp>
       <p:sp>
         <p:nvSpPr>
-          <p:cNvPr id="140" name=""/>
+          <p:cNvPr id="143" name=""/>
           <p:cNvSpPr/>
           <p:nvPr/>
         </p:nvSpPr>
         <p:spPr>
           <a:xfrm flipH="1">
-            <a:off x="7075080" y="1634400"/>
+            <a:off x="7075080" y="1647720"/>
             <a:ext cx="22680" cy="0"/>
           </a:xfrm>
           <a:prstGeom prst="line">
@@ -7118,13 +7252,13 @@
       </p:sp>
       <p:sp>
         <p:nvSpPr>
-          <p:cNvPr id="141" name=""/>
+          <p:cNvPr id="144" name=""/>
           <p:cNvSpPr/>
           <p:nvPr/>
         </p:nvSpPr>
         <p:spPr>
           <a:xfrm flipH="1">
-            <a:off x="7075080" y="1465920"/>
+            <a:off x="7075080" y="1486080"/>
             <a:ext cx="22680" cy="0"/>
           </a:xfrm>
           <a:prstGeom prst="line">
@@ -7161,7 +7295,7 @@
       </p:sp>
       <p:sp>
         <p:nvSpPr>
-          <p:cNvPr id="142" name=""/>
+          <p:cNvPr id="145" name=""/>
           <p:cNvSpPr txBox="1"/>
           <p:nvPr/>
         </p:nvSpPr>
@@ -7209,7 +7343,7 @@
       </p:sp>
       <p:sp>
         <p:nvSpPr>
-          <p:cNvPr id="143" name=""/>
+          <p:cNvPr id="146" name=""/>
           <p:cNvSpPr txBox="1"/>
           <p:nvPr/>
         </p:nvSpPr>
@@ -7257,13 +7391,13 @@
       </p:sp>
       <p:sp>
         <p:nvSpPr>
-          <p:cNvPr id="144" name=""/>
+          <p:cNvPr id="147" name=""/>
           <p:cNvSpPr txBox="1"/>
           <p:nvPr/>
         </p:nvSpPr>
         <p:spPr>
           <a:xfrm>
-            <a:off x="7252200" y="1758600"/>
+            <a:off x="7252200" y="1765440"/>
             <a:ext cx="127800" cy="114840"/>
           </a:xfrm>
           <a:prstGeom prst="rect">
@@ -7305,13 +7439,13 @@
       </p:sp>
       <p:sp>
         <p:nvSpPr>
-          <p:cNvPr id="145" name=""/>
+          <p:cNvPr id="148" name=""/>
           <p:cNvSpPr txBox="1"/>
           <p:nvPr/>
         </p:nvSpPr>
         <p:spPr>
           <a:xfrm>
-            <a:off x="7252200" y="1590120"/>
+            <a:off x="7252200" y="1603800"/>
             <a:ext cx="127800" cy="114840"/>
           </a:xfrm>
           <a:prstGeom prst="rect">
@@ -7353,13 +7487,13 @@
       </p:sp>
       <p:sp>
         <p:nvSpPr>
-          <p:cNvPr id="146" name=""/>
+          <p:cNvPr id="149" name=""/>
           <p:cNvSpPr txBox="1"/>
           <p:nvPr/>
         </p:nvSpPr>
         <p:spPr>
           <a:xfrm>
-            <a:off x="7252200" y="1421640"/>
+            <a:off x="7252200" y="1441800"/>
             <a:ext cx="127800" cy="114840"/>
           </a:xfrm>
           <a:prstGeom prst="rect">
@@ -7401,7 +7535,7 @@
       </p:sp>
       <p:sp>
         <p:nvSpPr>
-          <p:cNvPr id="147" name=""/>
+          <p:cNvPr id="150" name=""/>
           <p:cNvSpPr txBox="1"/>
           <p:nvPr/>
         </p:nvSpPr>
@@ -7449,7 +7583,7 @@
       </p:sp>
       <p:sp>
         <p:nvSpPr>
-          <p:cNvPr id="148" name=""/>
+          <p:cNvPr id="151" name=""/>
           <p:cNvSpPr txBox="1"/>
           <p:nvPr/>
         </p:nvSpPr>
@@ -7497,7 +7631,7 @@
       </p:sp>
       <p:sp>
         <p:nvSpPr>
-          <p:cNvPr id="149" name=""/>
+          <p:cNvPr id="152" name=""/>
           <p:cNvSpPr txBox="1"/>
           <p:nvPr/>
         </p:nvSpPr>
@@ -7545,7 +7679,7 @@
       </p:sp>
       <p:sp>
         <p:nvSpPr>
-          <p:cNvPr id="150" name=""/>
+          <p:cNvPr id="153" name=""/>
           <p:cNvSpPr/>
           <p:nvPr/>
         </p:nvSpPr>
@@ -7605,7 +7739,7 @@
       </p:sp>
       <p:sp>
         <p:nvSpPr>
-          <p:cNvPr id="151" name=""/>
+          <p:cNvPr id="154" name=""/>
           <p:cNvSpPr/>
           <p:nvPr/>
         </p:nvSpPr>
@@ -7648,7 +7782,7 @@
       </p:sp>
       <p:sp>
         <p:nvSpPr>
-          <p:cNvPr id="152" name=""/>
+          <p:cNvPr id="155" name=""/>
           <p:cNvSpPr/>
           <p:nvPr/>
         </p:nvSpPr>
@@ -7691,7 +7825,7 @@
       </p:sp>
       <p:sp>
         <p:nvSpPr>
-          <p:cNvPr id="153" name=""/>
+          <p:cNvPr id="156" name=""/>
           <p:cNvSpPr/>
           <p:nvPr/>
         </p:nvSpPr>
@@ -7734,7 +7868,7 @@
       </p:sp>
       <p:sp>
         <p:nvSpPr>
-          <p:cNvPr id="154" name=""/>
+          <p:cNvPr id="157" name=""/>
           <p:cNvSpPr/>
           <p:nvPr/>
         </p:nvSpPr>
@@ -7777,7 +7911,7 @@
       </p:sp>
       <p:sp>
         <p:nvSpPr>
-          <p:cNvPr id="155" name=""/>
+          <p:cNvPr id="158" name=""/>
           <p:cNvSpPr/>
           <p:nvPr/>
         </p:nvSpPr>
@@ -7823,14 +7957,14 @@
       </p:sp>
       <p:sp>
         <p:nvSpPr>
-          <p:cNvPr id="156" name=""/>
-          <p:cNvSpPr/>
-          <p:nvPr/>
-        </p:nvSpPr>
-        <p:spPr>
-          <a:xfrm>
-            <a:off x="3076560" y="5339520"/>
-            <a:ext cx="2242440" cy="0"/>
+          <p:cNvPr id="159" name=""/>
+          <p:cNvSpPr/>
+          <p:nvPr/>
+        </p:nvSpPr>
+        <p:spPr>
+          <a:xfrm>
+            <a:off x="3145320" y="5339520"/>
+            <a:ext cx="2174760" cy="0"/>
           </a:xfrm>
           <a:prstGeom prst="line">
             <a:avLst/>
@@ -7866,14 +8000,14 @@
       </p:sp>
       <p:sp>
         <p:nvSpPr>
-          <p:cNvPr id="157" name=""/>
-          <p:cNvSpPr/>
-          <p:nvPr/>
-        </p:nvSpPr>
-        <p:spPr>
-          <a:xfrm>
-            <a:off x="3340440" y="5100840"/>
-            <a:ext cx="2338920" cy="0"/>
+          <p:cNvPr id="160" name=""/>
+          <p:cNvSpPr/>
+          <p:nvPr/>
+        </p:nvSpPr>
+        <p:spPr>
+          <a:xfrm>
+            <a:off x="3397680" y="5100840"/>
+            <a:ext cx="2266920" cy="0"/>
           </a:xfrm>
           <a:prstGeom prst="line">
             <a:avLst/>
@@ -7909,14 +8043,14 @@
       </p:sp>
       <p:sp>
         <p:nvSpPr>
-          <p:cNvPr id="158" name=""/>
-          <p:cNvSpPr/>
-          <p:nvPr/>
-        </p:nvSpPr>
-        <p:spPr>
-          <a:xfrm>
-            <a:off x="3237120" y="5220000"/>
-            <a:ext cx="2285280" cy="0"/>
+          <p:cNvPr id="161" name=""/>
+          <p:cNvSpPr/>
+          <p:nvPr/>
+        </p:nvSpPr>
+        <p:spPr>
+          <a:xfrm>
+            <a:off x="3279240" y="5220000"/>
+            <a:ext cx="2216880" cy="0"/>
           </a:xfrm>
           <a:prstGeom prst="line">
             <a:avLst/>
@@ -7952,14 +8086,14 @@
       </p:sp>
       <p:sp>
         <p:nvSpPr>
-          <p:cNvPr id="159" name=""/>
-          <p:cNvSpPr/>
-          <p:nvPr/>
-        </p:nvSpPr>
-        <p:spPr>
-          <a:xfrm>
-            <a:off x="3285720" y="4827960"/>
-            <a:ext cx="2232000" cy="0"/>
+          <p:cNvPr id="162" name=""/>
+          <p:cNvSpPr/>
+          <p:nvPr/>
+        </p:nvSpPr>
+        <p:spPr>
+          <a:xfrm>
+            <a:off x="3305880" y="4827960"/>
+            <a:ext cx="2141280" cy="0"/>
           </a:xfrm>
           <a:prstGeom prst="line">
             <a:avLst/>
@@ -7995,14 +8129,14 @@
       </p:sp>
       <p:sp>
         <p:nvSpPr>
-          <p:cNvPr id="160" name=""/>
-          <p:cNvSpPr/>
-          <p:nvPr/>
-        </p:nvSpPr>
-        <p:spPr>
-          <a:xfrm>
-            <a:off x="3524400" y="4589280"/>
-            <a:ext cx="2318040" cy="0"/>
+          <p:cNvPr id="163" name=""/>
+          <p:cNvSpPr/>
+          <p:nvPr/>
+        </p:nvSpPr>
+        <p:spPr>
+          <a:xfrm>
+            <a:off x="3532680" y="4589280"/>
+            <a:ext cx="2223000" cy="0"/>
           </a:xfrm>
           <a:prstGeom prst="line">
             <a:avLst/>
@@ -8038,14 +8172,14 @@
       </p:sp>
       <p:sp>
         <p:nvSpPr>
-          <p:cNvPr id="161" name=""/>
-          <p:cNvSpPr/>
-          <p:nvPr/>
-        </p:nvSpPr>
-        <p:spPr>
-          <a:xfrm>
-            <a:off x="3440160" y="4708440"/>
-            <a:ext cx="2271240" cy="0"/>
+          <p:cNvPr id="164" name=""/>
+          <p:cNvSpPr/>
+          <p:nvPr/>
+        </p:nvSpPr>
+        <p:spPr>
+          <a:xfrm>
+            <a:off x="3432960" y="4708440"/>
+            <a:ext cx="2180880" cy="0"/>
           </a:xfrm>
           <a:prstGeom prst="line">
             <a:avLst/>
@@ -8081,14 +8215,14 @@
       </p:sp>
       <p:sp>
         <p:nvSpPr>
-          <p:cNvPr id="162" name=""/>
-          <p:cNvSpPr/>
-          <p:nvPr/>
-        </p:nvSpPr>
-        <p:spPr>
-          <a:xfrm>
-            <a:off x="3399840" y="4316400"/>
-            <a:ext cx="2399040" cy="0"/>
+          <p:cNvPr id="165" name=""/>
+          <p:cNvSpPr/>
+          <p:nvPr/>
+        </p:nvSpPr>
+        <p:spPr>
+          <a:xfrm>
+            <a:off x="3466440" y="4316400"/>
+            <a:ext cx="2347560" cy="0"/>
           </a:xfrm>
           <a:prstGeom prst="line">
             <a:avLst/>
@@ -8124,14 +8258,14 @@
       </p:sp>
       <p:sp>
         <p:nvSpPr>
-          <p:cNvPr id="163" name=""/>
-          <p:cNvSpPr/>
-          <p:nvPr/>
-        </p:nvSpPr>
-        <p:spPr>
-          <a:xfrm>
-            <a:off x="3708000" y="4077360"/>
-            <a:ext cx="2537280" cy="0"/>
+          <p:cNvPr id="166" name=""/>
+          <p:cNvSpPr/>
+          <p:nvPr/>
+        </p:nvSpPr>
+        <p:spPr>
+          <a:xfrm>
+            <a:off x="3762360" y="4077360"/>
+            <a:ext cx="2482920" cy="0"/>
           </a:xfrm>
           <a:prstGeom prst="line">
             <a:avLst/>
@@ -8167,14 +8301,14 @@
       </p:sp>
       <p:sp>
         <p:nvSpPr>
-          <p:cNvPr id="164" name=""/>
-          <p:cNvSpPr/>
-          <p:nvPr/>
-        </p:nvSpPr>
-        <p:spPr>
-          <a:xfrm>
-            <a:off x="3597120" y="4196880"/>
-            <a:ext cx="2462400" cy="0"/>
+          <p:cNvPr id="167" name=""/>
+          <p:cNvSpPr/>
+          <p:nvPr/>
+        </p:nvSpPr>
+        <p:spPr>
+          <a:xfrm>
+            <a:off x="3648240" y="4196880"/>
+            <a:ext cx="2410200" cy="0"/>
           </a:xfrm>
           <a:prstGeom prst="line">
             <a:avLst/>
@@ -8210,14 +8344,14 @@
       </p:sp>
       <p:sp>
         <p:nvSpPr>
-          <p:cNvPr id="165" name=""/>
-          <p:cNvSpPr/>
-          <p:nvPr/>
-        </p:nvSpPr>
-        <p:spPr>
-          <a:xfrm>
-            <a:off x="2181600" y="3804840"/>
-            <a:ext cx="1974240" cy="0"/>
+          <p:cNvPr id="168" name=""/>
+          <p:cNvSpPr/>
+          <p:nvPr/>
+        </p:nvSpPr>
+        <p:spPr>
+          <a:xfrm>
+            <a:off x="2166480" y="3804840"/>
+            <a:ext cx="1878480" cy="0"/>
           </a:xfrm>
           <a:prstGeom prst="line">
             <a:avLst/>
@@ -8253,14 +8387,14 @@
       </p:sp>
       <p:sp>
         <p:nvSpPr>
-          <p:cNvPr id="166" name=""/>
-          <p:cNvSpPr/>
-          <p:nvPr/>
-        </p:nvSpPr>
-        <p:spPr>
-          <a:xfrm>
-            <a:off x="2523240" y="3565800"/>
-            <a:ext cx="2088000" cy="0"/>
+          <p:cNvPr id="169" name=""/>
+          <p:cNvSpPr/>
+          <p:nvPr/>
+        </p:nvSpPr>
+        <p:spPr>
+          <a:xfrm>
+            <a:off x="2493000" y="3565800"/>
+            <a:ext cx="1988280" cy="0"/>
           </a:xfrm>
           <a:prstGeom prst="line">
             <a:avLst/>
@@ -8296,14 +8430,14 @@
       </p:sp>
       <p:sp>
         <p:nvSpPr>
-          <p:cNvPr id="167" name=""/>
-          <p:cNvSpPr/>
-          <p:nvPr/>
-        </p:nvSpPr>
-        <p:spPr>
-          <a:xfrm>
-            <a:off x="2320920" y="3685320"/>
-            <a:ext cx="2005560" cy="0"/>
+          <p:cNvPr id="170" name=""/>
+          <p:cNvSpPr/>
+          <p:nvPr/>
+        </p:nvSpPr>
+        <p:spPr>
+          <a:xfrm>
+            <a:off x="2279880" y="3685320"/>
+            <a:ext cx="1912680" cy="0"/>
           </a:xfrm>
           <a:prstGeom prst="line">
             <a:avLst/>
@@ -8339,14 +8473,14 @@
       </p:sp>
       <p:sp>
         <p:nvSpPr>
-          <p:cNvPr id="168" name=""/>
-          <p:cNvSpPr/>
-          <p:nvPr/>
-        </p:nvSpPr>
-        <p:spPr>
-          <a:xfrm>
-            <a:off x="2883600" y="5399280"/>
-            <a:ext cx="2048760" cy="0"/>
+          <p:cNvPr id="171" name=""/>
+          <p:cNvSpPr/>
+          <p:nvPr/>
+        </p:nvSpPr>
+        <p:spPr>
+          <a:xfrm>
+            <a:off x="2832840" y="5399280"/>
+            <a:ext cx="1962360" cy="0"/>
           </a:xfrm>
           <a:prstGeom prst="line">
             <a:avLst/>
@@ -8382,14 +8516,14 @@
       </p:sp>
       <p:sp>
         <p:nvSpPr>
-          <p:cNvPr id="169" name=""/>
-          <p:cNvSpPr/>
-          <p:nvPr/>
-        </p:nvSpPr>
-        <p:spPr>
-          <a:xfrm>
-            <a:off x="2924280" y="5160600"/>
-            <a:ext cx="2039760" cy="0"/>
+          <p:cNvPr id="172" name=""/>
+          <p:cNvSpPr/>
+          <p:nvPr/>
+        </p:nvSpPr>
+        <p:spPr>
+          <a:xfrm>
+            <a:off x="2874960" y="5160600"/>
+            <a:ext cx="1954800" cy="0"/>
           </a:xfrm>
           <a:prstGeom prst="line">
             <a:avLst/>
@@ -8425,14 +8559,14 @@
       </p:sp>
       <p:sp>
         <p:nvSpPr>
-          <p:cNvPr id="170" name=""/>
-          <p:cNvSpPr/>
-          <p:nvPr/>
-        </p:nvSpPr>
-        <p:spPr>
-          <a:xfrm>
-            <a:off x="2905200" y="5279760"/>
-            <a:ext cx="2028600" cy="0"/>
+          <p:cNvPr id="173" name=""/>
+          <p:cNvSpPr/>
+          <p:nvPr/>
+        </p:nvSpPr>
+        <p:spPr>
+          <a:xfrm>
+            <a:off x="2849040" y="5279760"/>
+            <a:ext cx="1944000" cy="0"/>
           </a:xfrm>
           <a:prstGeom prst="line">
             <a:avLst/>
@@ -8468,14 +8602,14 @@
       </p:sp>
       <p:sp>
         <p:nvSpPr>
-          <p:cNvPr id="171" name=""/>
-          <p:cNvSpPr/>
-          <p:nvPr/>
-        </p:nvSpPr>
-        <p:spPr>
-          <a:xfrm>
-            <a:off x="2820960" y="4887720"/>
-            <a:ext cx="2046600" cy="0"/>
+          <p:cNvPr id="174" name=""/>
+          <p:cNvSpPr/>
+          <p:nvPr/>
+        </p:nvSpPr>
+        <p:spPr>
+          <a:xfrm>
+            <a:off x="2772000" y="4887720"/>
+            <a:ext cx="1956960" cy="0"/>
           </a:xfrm>
           <a:prstGeom prst="line">
             <a:avLst/>
@@ -8511,14 +8645,14 @@
       </p:sp>
       <p:sp>
         <p:nvSpPr>
-          <p:cNvPr id="172" name=""/>
-          <p:cNvSpPr/>
-          <p:nvPr/>
-        </p:nvSpPr>
-        <p:spPr>
-          <a:xfrm>
-            <a:off x="2851560" y="4648680"/>
-            <a:ext cx="2032920" cy="0"/>
+          <p:cNvPr id="175" name=""/>
+          <p:cNvSpPr/>
+          <p:nvPr/>
+        </p:nvSpPr>
+        <p:spPr>
+          <a:xfrm>
+            <a:off x="2803680" y="4648680"/>
+            <a:ext cx="1944360" cy="0"/>
           </a:xfrm>
           <a:prstGeom prst="line">
             <a:avLst/>
@@ -8554,14 +8688,14 @@
       </p:sp>
       <p:sp>
         <p:nvSpPr>
-          <p:cNvPr id="173" name=""/>
-          <p:cNvSpPr/>
-          <p:nvPr/>
-        </p:nvSpPr>
-        <p:spPr>
-          <a:xfrm>
-            <a:off x="2834640" y="4768200"/>
-            <a:ext cx="2023920" cy="0"/>
+          <p:cNvPr id="176" name=""/>
+          <p:cNvSpPr/>
+          <p:nvPr/>
+        </p:nvSpPr>
+        <p:spPr>
+          <a:xfrm>
+            <a:off x="2781360" y="4768200"/>
+            <a:ext cx="1935720" cy="0"/>
           </a:xfrm>
           <a:prstGeom prst="line">
             <a:avLst/>
@@ -8597,14 +8731,14 @@
       </p:sp>
       <p:sp>
         <p:nvSpPr>
-          <p:cNvPr id="174" name=""/>
-          <p:cNvSpPr/>
-          <p:nvPr/>
-        </p:nvSpPr>
-        <p:spPr>
-          <a:xfrm>
-            <a:off x="2935800" y="4375800"/>
-            <a:ext cx="2099160" cy="0"/>
+          <p:cNvPr id="177" name=""/>
+          <p:cNvSpPr/>
+          <p:nvPr/>
+        </p:nvSpPr>
+        <p:spPr>
+          <a:xfrm>
+            <a:off x="2886120" y="4375800"/>
+            <a:ext cx="2014920" cy="0"/>
           </a:xfrm>
           <a:prstGeom prst="line">
             <a:avLst/>
@@ -8640,14 +8774,14 @@
       </p:sp>
       <p:sp>
         <p:nvSpPr>
-          <p:cNvPr id="175" name=""/>
-          <p:cNvSpPr/>
-          <p:nvPr/>
-        </p:nvSpPr>
-        <p:spPr>
-          <a:xfrm>
-            <a:off x="2985840" y="4137120"/>
-            <a:ext cx="2099160" cy="0"/>
+          <p:cNvPr id="178" name=""/>
+          <p:cNvSpPr/>
+          <p:nvPr/>
+        </p:nvSpPr>
+        <p:spPr>
+          <a:xfrm>
+            <a:off x="2937240" y="4137120"/>
+            <a:ext cx="2016360" cy="0"/>
           </a:xfrm>
           <a:prstGeom prst="line">
             <a:avLst/>
@@ -8683,14 +8817,14 @@
       </p:sp>
       <p:sp>
         <p:nvSpPr>
-          <p:cNvPr id="176" name=""/>
-          <p:cNvSpPr/>
-          <p:nvPr/>
-        </p:nvSpPr>
-        <p:spPr>
-          <a:xfrm>
-            <a:off x="2958120" y="4256640"/>
-            <a:ext cx="2085120" cy="0"/>
+          <p:cNvPr id="179" name=""/>
+          <p:cNvSpPr/>
+          <p:nvPr/>
+        </p:nvSpPr>
+        <p:spPr>
+          <a:xfrm>
+            <a:off x="2905920" y="4256640"/>
+            <a:ext cx="2003040" cy="0"/>
           </a:xfrm>
           <a:prstGeom prst="line">
             <a:avLst/>
@@ -8726,14 +8860,14 @@
       </p:sp>
       <p:sp>
         <p:nvSpPr>
-          <p:cNvPr id="177" name=""/>
-          <p:cNvSpPr/>
-          <p:nvPr/>
-        </p:nvSpPr>
-        <p:spPr>
-          <a:xfrm>
-            <a:off x="2712960" y="3864240"/>
-            <a:ext cx="1955520" cy="0"/>
+          <p:cNvPr id="180" name=""/>
+          <p:cNvSpPr/>
+          <p:nvPr/>
+        </p:nvSpPr>
+        <p:spPr>
+          <a:xfrm>
+            <a:off x="2658240" y="3864240"/>
+            <a:ext cx="1862640" cy="0"/>
           </a:xfrm>
           <a:prstGeom prst="line">
             <a:avLst/>
@@ -8769,14 +8903,14 @@
       </p:sp>
       <p:sp>
         <p:nvSpPr>
-          <p:cNvPr id="178" name=""/>
-          <p:cNvSpPr/>
-          <p:nvPr/>
-        </p:nvSpPr>
-        <p:spPr>
-          <a:xfrm>
-            <a:off x="2755800" y="3625560"/>
-            <a:ext cx="1942200" cy="0"/>
+          <p:cNvPr id="181" name=""/>
+          <p:cNvSpPr/>
+          <p:nvPr/>
+        </p:nvSpPr>
+        <p:spPr>
+          <a:xfrm>
+            <a:off x="2699640" y="3625560"/>
+            <a:ext cx="1850040" cy="0"/>
           </a:xfrm>
           <a:prstGeom prst="line">
             <a:avLst/>
@@ -8812,14 +8946,14 @@
       </p:sp>
       <p:sp>
         <p:nvSpPr>
-          <p:cNvPr id="179" name=""/>
-          <p:cNvSpPr/>
-          <p:nvPr/>
-        </p:nvSpPr>
-        <p:spPr>
-          <a:xfrm>
-            <a:off x="2724480" y="3745080"/>
-            <a:ext cx="1924920" cy="0"/>
+          <p:cNvPr id="182" name=""/>
+          <p:cNvSpPr/>
+          <p:nvPr/>
+        </p:nvSpPr>
+        <p:spPr>
+          <a:xfrm>
+            <a:off x="2665080" y="3745080"/>
+            <a:ext cx="1835640" cy="0"/>
           </a:xfrm>
           <a:prstGeom prst="line">
             <a:avLst/>
@@ -8855,13 +8989,355 @@
       </p:sp>
       <p:sp>
         <p:nvSpPr>
-          <p:cNvPr id="180" name=""/>
-          <p:cNvSpPr/>
-          <p:nvPr/>
-        </p:nvSpPr>
-        <p:spPr>
-          <a:xfrm>
-            <a:off x="4092120" y="5295240"/>
+          <p:cNvPr id="183" name=""/>
+          <p:cNvSpPr/>
+          <p:nvPr/>
+        </p:nvSpPr>
+        <p:spPr>
+          <a:xfrm>
+            <a:off x="4129560" y="5295240"/>
+            <a:ext cx="77040" cy="66600"/>
+          </a:xfrm>
+          <a:custGeom>
+            <a:avLst/>
+            <a:gdLst/>
+            <a:ahLst/>
+            <a:rect l="0" t="0" r="r" b="b"/>
+            <a:pathLst>
+              <a:path w="214" h="185">
+                <a:moveTo>
+                  <a:pt x="106" y="0"/>
+                </a:moveTo>
+                <a:lnTo>
+                  <a:pt x="214" y="185"/>
+                </a:lnTo>
+                <a:lnTo>
+                  <a:pt x="0" y="185"/>
+                </a:lnTo>
+                <a:lnTo>
+                  <a:pt x="106" y="0"/>
+                </a:lnTo>
+                <a:close/>
+              </a:path>
+            </a:pathLst>
+          </a:custGeom>
+          <a:solidFill>
+            <a:srgbClr val="0072B2"/>
+          </a:solidFill>
+          <a:ln w="0">
+            <a:noFill/>
+          </a:ln>
+        </p:spPr>
+        <p:txBody>
+          <a:bodyPr lIns="0" tIns="0" rIns="0" bIns="0" anchor="t">
+            <a:noAutofit/>
+          </a:bodyPr>
+          <a:p>
+            <a:endParaRPr lang="en-US" sz="2400" b="0" u="none" strike="noStrike">
+              <a:solidFill>
+                <a:srgbClr val="FFFFFF"/>
+              </a:solidFill>
+              <a:effectLst/>
+              <a:uFillTx/>
+              <a:latin typeface="Times New Roman"/>
+            </a:endParaRPr>
+          </a:p>
+        </p:txBody>
+      </p:sp>
+      <p:sp>
+        <p:nvSpPr>
+          <p:cNvPr id="184" name=""/>
+          <p:cNvSpPr/>
+          <p:nvPr/>
+        </p:nvSpPr>
+        <p:spPr>
+          <a:xfrm>
+            <a:off x="4424400" y="5056560"/>
+            <a:ext cx="77040" cy="66600"/>
+          </a:xfrm>
+          <a:custGeom>
+            <a:avLst/>
+            <a:gdLst/>
+            <a:ahLst/>
+            <a:rect l="0" t="0" r="r" b="b"/>
+            <a:pathLst>
+              <a:path w="214" h="185">
+                <a:moveTo>
+                  <a:pt x="106" y="0"/>
+                </a:moveTo>
+                <a:lnTo>
+                  <a:pt x="214" y="185"/>
+                </a:lnTo>
+                <a:lnTo>
+                  <a:pt x="0" y="185"/>
+                </a:lnTo>
+                <a:lnTo>
+                  <a:pt x="106" y="0"/>
+                </a:lnTo>
+                <a:close/>
+              </a:path>
+            </a:pathLst>
+          </a:custGeom>
+          <a:solidFill>
+            <a:srgbClr val="999999"/>
+          </a:solidFill>
+          <a:ln w="0">
+            <a:noFill/>
+          </a:ln>
+        </p:spPr>
+        <p:txBody>
+          <a:bodyPr lIns="0" tIns="0" rIns="0" bIns="0" anchor="t">
+            <a:noAutofit/>
+          </a:bodyPr>
+          <a:p>
+            <a:endParaRPr lang="en-US" sz="2400" b="0" u="none" strike="noStrike">
+              <a:solidFill>
+                <a:srgbClr val="FFFFFF"/>
+              </a:solidFill>
+              <a:effectLst/>
+              <a:uFillTx/>
+              <a:latin typeface="Times New Roman"/>
+            </a:endParaRPr>
+          </a:p>
+        </p:txBody>
+      </p:sp>
+      <p:sp>
+        <p:nvSpPr>
+          <p:cNvPr id="185" name=""/>
+          <p:cNvSpPr/>
+          <p:nvPr/>
+        </p:nvSpPr>
+        <p:spPr>
+          <a:xfrm>
+            <a:off x="4282920" y="5175720"/>
+            <a:ext cx="77040" cy="66960"/>
+          </a:xfrm>
+          <a:custGeom>
+            <a:avLst/>
+            <a:gdLst/>
+            <a:ahLst/>
+            <a:rect l="0" t="0" r="r" b="b"/>
+            <a:pathLst>
+              <a:path w="214" h="186">
+                <a:moveTo>
+                  <a:pt x="106" y="0"/>
+                </a:moveTo>
+                <a:lnTo>
+                  <a:pt x="214" y="186"/>
+                </a:lnTo>
+                <a:lnTo>
+                  <a:pt x="0" y="186"/>
+                </a:lnTo>
+                <a:lnTo>
+                  <a:pt x="106" y="0"/>
+                </a:lnTo>
+                <a:close/>
+              </a:path>
+            </a:pathLst>
+          </a:custGeom>
+          <a:solidFill>
+            <a:srgbClr val="E69F00"/>
+          </a:solidFill>
+          <a:ln w="0">
+            <a:noFill/>
+          </a:ln>
+        </p:spPr>
+        <p:txBody>
+          <a:bodyPr lIns="0" tIns="0" rIns="0" bIns="0" anchor="t">
+            <a:noAutofit/>
+          </a:bodyPr>
+          <a:p>
+            <a:endParaRPr lang="en-US" sz="2400" b="0" u="none" strike="noStrike">
+              <a:solidFill>
+                <a:srgbClr val="000000"/>
+              </a:solidFill>
+              <a:effectLst/>
+              <a:uFillTx/>
+              <a:latin typeface="Times New Roman"/>
+            </a:endParaRPr>
+          </a:p>
+        </p:txBody>
+      </p:sp>
+      <p:sp>
+        <p:nvSpPr>
+          <p:cNvPr id="186" name=""/>
+          <p:cNvSpPr/>
+          <p:nvPr/>
+        </p:nvSpPr>
+        <p:spPr>
+          <a:xfrm>
+            <a:off x="4276080" y="4783680"/>
+            <a:ext cx="77040" cy="66600"/>
+          </a:xfrm>
+          <a:custGeom>
+            <a:avLst/>
+            <a:gdLst/>
+            <a:ahLst/>
+            <a:rect l="0" t="0" r="r" b="b"/>
+            <a:pathLst>
+              <a:path w="214" h="185">
+                <a:moveTo>
+                  <a:pt x="107" y="0"/>
+                </a:moveTo>
+                <a:lnTo>
+                  <a:pt x="214" y="185"/>
+                </a:lnTo>
+                <a:lnTo>
+                  <a:pt x="0" y="185"/>
+                </a:lnTo>
+                <a:lnTo>
+                  <a:pt x="107" y="0"/>
+                </a:lnTo>
+                <a:close/>
+              </a:path>
+            </a:pathLst>
+          </a:custGeom>
+          <a:solidFill>
+            <a:srgbClr val="0072B2"/>
+          </a:solidFill>
+          <a:ln w="0">
+            <a:noFill/>
+          </a:ln>
+        </p:spPr>
+        <p:txBody>
+          <a:bodyPr lIns="0" tIns="0" rIns="0" bIns="0" anchor="t">
+            <a:noAutofit/>
+          </a:bodyPr>
+          <a:p>
+            <a:endParaRPr lang="en-US" sz="2400" b="0" u="none" strike="noStrike">
+              <a:solidFill>
+                <a:srgbClr val="FFFFFF"/>
+              </a:solidFill>
+              <a:effectLst/>
+              <a:uFillTx/>
+              <a:latin typeface="Times New Roman"/>
+            </a:endParaRPr>
+          </a:p>
+        </p:txBody>
+      </p:sp>
+      <p:sp>
+        <p:nvSpPr>
+          <p:cNvPr id="187" name=""/>
+          <p:cNvSpPr/>
+          <p:nvPr/>
+        </p:nvSpPr>
+        <p:spPr>
+          <a:xfrm>
+            <a:off x="4540680" y="4545000"/>
+            <a:ext cx="77400" cy="66600"/>
+          </a:xfrm>
+          <a:custGeom>
+            <a:avLst/>
+            <a:gdLst/>
+            <a:ahLst/>
+            <a:rect l="0" t="0" r="r" b="b"/>
+            <a:pathLst>
+              <a:path w="215" h="185">
+                <a:moveTo>
+                  <a:pt x="108" y="0"/>
+                </a:moveTo>
+                <a:lnTo>
+                  <a:pt x="215" y="185"/>
+                </a:lnTo>
+                <a:lnTo>
+                  <a:pt x="0" y="185"/>
+                </a:lnTo>
+                <a:lnTo>
+                  <a:pt x="108" y="0"/>
+                </a:lnTo>
+                <a:close/>
+              </a:path>
+            </a:pathLst>
+          </a:custGeom>
+          <a:solidFill>
+            <a:srgbClr val="999999"/>
+          </a:solidFill>
+          <a:ln w="0">
+            <a:noFill/>
+          </a:ln>
+        </p:spPr>
+        <p:txBody>
+          <a:bodyPr lIns="0" tIns="0" rIns="0" bIns="0" anchor="t">
+            <a:noAutofit/>
+          </a:bodyPr>
+          <a:p>
+            <a:endParaRPr lang="en-US" sz="2400" b="0" u="none" strike="noStrike">
+              <a:solidFill>
+                <a:srgbClr val="FFFFFF"/>
+              </a:solidFill>
+              <a:effectLst/>
+              <a:uFillTx/>
+              <a:latin typeface="Times New Roman"/>
+            </a:endParaRPr>
+          </a:p>
+        </p:txBody>
+      </p:sp>
+      <p:sp>
+        <p:nvSpPr>
+          <p:cNvPr id="188" name=""/>
+          <p:cNvSpPr/>
+          <p:nvPr/>
+        </p:nvSpPr>
+        <p:spPr>
+          <a:xfrm>
+            <a:off x="4421880" y="4664160"/>
+            <a:ext cx="77040" cy="66960"/>
+          </a:xfrm>
+          <a:custGeom>
+            <a:avLst/>
+            <a:gdLst/>
+            <a:ahLst/>
+            <a:rect l="0" t="0" r="r" b="b"/>
+            <a:pathLst>
+              <a:path w="214" h="186">
+                <a:moveTo>
+                  <a:pt x="106" y="0"/>
+                </a:moveTo>
+                <a:lnTo>
+                  <a:pt x="214" y="186"/>
+                </a:lnTo>
+                <a:lnTo>
+                  <a:pt x="0" y="186"/>
+                </a:lnTo>
+                <a:lnTo>
+                  <a:pt x="106" y="0"/>
+                </a:lnTo>
+                <a:close/>
+              </a:path>
+            </a:pathLst>
+          </a:custGeom>
+          <a:solidFill>
+            <a:srgbClr val="E69F00"/>
+          </a:solidFill>
+          <a:ln w="0">
+            <a:noFill/>
+          </a:ln>
+        </p:spPr>
+        <p:txBody>
+          <a:bodyPr lIns="0" tIns="0" rIns="0" bIns="0" anchor="t">
+            <a:noAutofit/>
+          </a:bodyPr>
+          <a:p>
+            <a:endParaRPr lang="en-US" sz="2400" b="0" u="none" strike="noStrike">
+              <a:solidFill>
+                <a:srgbClr val="000000"/>
+              </a:solidFill>
+              <a:effectLst/>
+              <a:uFillTx/>
+              <a:latin typeface="Times New Roman"/>
+            </a:endParaRPr>
+          </a:p>
+        </p:txBody>
+      </p:sp>
+      <p:sp>
+        <p:nvSpPr>
+          <p:cNvPr id="189" name=""/>
+          <p:cNvSpPr/>
+          <p:nvPr/>
+        </p:nvSpPr>
+        <p:spPr>
+          <a:xfrm>
+            <a:off x="4529160" y="4272120"/>
             <a:ext cx="77040" cy="66600"/>
           </a:xfrm>
           <a:custGeom>
@@ -8912,13 +9388,13 @@
       </p:sp>
       <p:sp>
         <p:nvSpPr>
-          <p:cNvPr id="181" name=""/>
-          <p:cNvSpPr/>
-          <p:nvPr/>
-        </p:nvSpPr>
-        <p:spPr>
-          <a:xfrm>
-            <a:off x="4401000" y="5056560"/>
+          <p:cNvPr id="190" name=""/>
+          <p:cNvSpPr/>
+          <p:nvPr/>
+        </p:nvSpPr>
+        <p:spPr>
+          <a:xfrm>
+            <a:off x="4887360" y="4033440"/>
             <a:ext cx="77040" cy="66600"/>
           </a:xfrm>
           <a:custGeom>
@@ -8929,7 +9405,7 @@
             <a:pathLst>
               <a:path w="214" h="185">
                 <a:moveTo>
-                  <a:pt x="108" y="0"/>
+                  <a:pt x="107" y="0"/>
                 </a:moveTo>
                 <a:lnTo>
                   <a:pt x="214" y="185"/>
@@ -8938,7 +9414,7 @@
                   <a:pt x="0" y="185"/>
                 </a:lnTo>
                 <a:lnTo>
-                  <a:pt x="108" y="0"/>
+                  <a:pt x="107" y="0"/>
                 </a:lnTo>
                 <a:close/>
               </a:path>
@@ -8969,13 +9445,13 @@
       </p:sp>
       <p:sp>
         <p:nvSpPr>
-          <p:cNvPr id="182" name=""/>
-          <p:cNvSpPr/>
-          <p:nvPr/>
-        </p:nvSpPr>
-        <p:spPr>
-          <a:xfrm>
-            <a:off x="4273200" y="5175720"/>
+          <p:cNvPr id="191" name=""/>
+          <p:cNvSpPr/>
+          <p:nvPr/>
+        </p:nvSpPr>
+        <p:spPr>
+          <a:xfrm>
+            <a:off x="4740480" y="4152600"/>
             <a:ext cx="77040" cy="66960"/>
           </a:xfrm>
           <a:custGeom>
@@ -9026,14 +9502,14 @@
       </p:sp>
       <p:sp>
         <p:nvSpPr>
-          <p:cNvPr id="183" name=""/>
-          <p:cNvSpPr/>
-          <p:nvPr/>
-        </p:nvSpPr>
-        <p:spPr>
-          <a:xfrm>
-            <a:off x="4298400" y="4783680"/>
-            <a:ext cx="77040" cy="66600"/>
+          <p:cNvPr id="192" name=""/>
+          <p:cNvSpPr/>
+          <p:nvPr/>
+        </p:nvSpPr>
+        <p:spPr>
+          <a:xfrm>
+            <a:off x="3012120" y="3760200"/>
+            <a:ext cx="77040" cy="66960"/>
           </a:xfrm>
           <a:custGeom>
             <a:avLst/>
@@ -9041,15 +9517,15 @@
             <a:ahLst/>
             <a:rect l="0" t="0" r="r" b="b"/>
             <a:pathLst>
-              <a:path w="214" h="185">
+              <a:path w="214" h="186">
                 <a:moveTo>
                   <a:pt x="107" y="0"/>
                 </a:moveTo>
                 <a:lnTo>
-                  <a:pt x="214" y="185"/>
-                </a:lnTo>
-                <a:lnTo>
-                  <a:pt x="0" y="185"/>
+                  <a:pt x="214" y="186"/>
+                </a:lnTo>
+                <a:lnTo>
+                  <a:pt x="0" y="186"/>
                 </a:lnTo>
                 <a:lnTo>
                   <a:pt x="107" y="0"/>
@@ -9083,70 +9559,13 @@
       </p:sp>
       <p:sp>
         <p:nvSpPr>
-          <p:cNvPr id="184" name=""/>
-          <p:cNvSpPr/>
-          <p:nvPr/>
-        </p:nvSpPr>
-        <p:spPr>
-          <a:xfrm>
-            <a:off x="4577040" y="4545000"/>
-            <a:ext cx="77040" cy="66600"/>
-          </a:xfrm>
-          <a:custGeom>
-            <a:avLst/>
-            <a:gdLst/>
-            <a:ahLst/>
-            <a:rect l="0" t="0" r="r" b="b"/>
-            <a:pathLst>
-              <a:path w="214" h="185">
-                <a:moveTo>
-                  <a:pt x="107" y="0"/>
-                </a:moveTo>
-                <a:lnTo>
-                  <a:pt x="214" y="185"/>
-                </a:lnTo>
-                <a:lnTo>
-                  <a:pt x="0" y="185"/>
-                </a:lnTo>
-                <a:lnTo>
-                  <a:pt x="107" y="0"/>
-                </a:lnTo>
-                <a:close/>
-              </a:path>
-            </a:pathLst>
-          </a:custGeom>
-          <a:solidFill>
-            <a:srgbClr val="999999"/>
-          </a:solidFill>
-          <a:ln w="0">
-            <a:noFill/>
-          </a:ln>
-        </p:spPr>
-        <p:txBody>
-          <a:bodyPr lIns="0" tIns="0" rIns="0" bIns="0" anchor="t">
-            <a:noAutofit/>
-          </a:bodyPr>
-          <a:p>
-            <a:endParaRPr lang="en-US" sz="2400" b="0" u="none" strike="noStrike">
-              <a:solidFill>
-                <a:srgbClr val="FFFFFF"/>
-              </a:solidFill>
-              <a:effectLst/>
-              <a:uFillTx/>
-              <a:latin typeface="Times New Roman"/>
-            </a:endParaRPr>
-          </a:p>
-        </p:txBody>
-      </p:sp>
-      <p:sp>
-        <p:nvSpPr>
-          <p:cNvPr id="185" name=""/>
-          <p:cNvSpPr/>
-          <p:nvPr/>
-        </p:nvSpPr>
-        <p:spPr>
-          <a:xfrm>
-            <a:off x="4471200" y="4664160"/>
+          <p:cNvPr id="193" name=""/>
+          <p:cNvSpPr/>
+          <p:nvPr/>
+        </p:nvSpPr>
+        <p:spPr>
+          <a:xfrm>
+            <a:off x="3389400" y="3521520"/>
             <a:ext cx="77040" cy="66960"/>
           </a:xfrm>
           <a:custGeom>
@@ -9173,7 +9592,7 @@
             </a:pathLst>
           </a:custGeom>
           <a:solidFill>
-            <a:srgbClr val="E69F00"/>
+            <a:srgbClr val="999999"/>
           </a:solidFill>
           <a:ln w="0">
             <a:noFill/>
@@ -9186,63 +9605,6 @@
           <a:p>
             <a:endParaRPr lang="en-US" sz="2400" b="0" u="none" strike="noStrike">
               <a:solidFill>
-                <a:srgbClr val="000000"/>
-              </a:solidFill>
-              <a:effectLst/>
-              <a:uFillTx/>
-              <a:latin typeface="Times New Roman"/>
-            </a:endParaRPr>
-          </a:p>
-        </p:txBody>
-      </p:sp>
-      <p:sp>
-        <p:nvSpPr>
-          <p:cNvPr id="186" name=""/>
-          <p:cNvSpPr/>
-          <p:nvPr/>
-        </p:nvSpPr>
-        <p:spPr>
-          <a:xfrm>
-            <a:off x="4487400" y="4272120"/>
-            <a:ext cx="77040" cy="66600"/>
-          </a:xfrm>
-          <a:custGeom>
-            <a:avLst/>
-            <a:gdLst/>
-            <a:ahLst/>
-            <a:rect l="0" t="0" r="r" b="b"/>
-            <a:pathLst>
-              <a:path w="214" h="185">
-                <a:moveTo>
-                  <a:pt x="106" y="0"/>
-                </a:moveTo>
-                <a:lnTo>
-                  <a:pt x="214" y="185"/>
-                </a:lnTo>
-                <a:lnTo>
-                  <a:pt x="0" y="185"/>
-                </a:lnTo>
-                <a:lnTo>
-                  <a:pt x="106" y="0"/>
-                </a:lnTo>
-                <a:close/>
-              </a:path>
-            </a:pathLst>
-          </a:custGeom>
-          <a:solidFill>
-            <a:srgbClr val="0072B2"/>
-          </a:solidFill>
-          <a:ln w="0">
-            <a:noFill/>
-          </a:ln>
-        </p:spPr>
-        <p:txBody>
-          <a:bodyPr lIns="0" tIns="0" rIns="0" bIns="0" anchor="t">
-            <a:noAutofit/>
-          </a:bodyPr>
-          <a:p>
-            <a:endParaRPr lang="en-US" sz="2400" b="0" u="none" strike="noStrike">
-              <a:solidFill>
                 <a:srgbClr val="FFFFFF"/>
               </a:solidFill>
               <a:effectLst/>
@@ -9254,13 +9616,13 @@
       </p:sp>
       <p:sp>
         <p:nvSpPr>
-          <p:cNvPr id="187" name=""/>
-          <p:cNvSpPr/>
-          <p:nvPr/>
-        </p:nvSpPr>
-        <p:spPr>
-          <a:xfrm>
-            <a:off x="4858920" y="4033440"/>
+          <p:cNvPr id="194" name=""/>
+          <p:cNvSpPr/>
+          <p:nvPr/>
+        </p:nvSpPr>
+        <p:spPr>
+          <a:xfrm>
+            <a:off x="3141360" y="3641040"/>
             <a:ext cx="77400" cy="66600"/>
           </a:xfrm>
           <a:custGeom>
@@ -9271,7 +9633,7 @@
             <a:pathLst>
               <a:path w="215" h="185">
                 <a:moveTo>
-                  <a:pt x="108" y="0"/>
+                  <a:pt x="107" y="0"/>
                 </a:moveTo>
                 <a:lnTo>
                   <a:pt x="215" y="185"/>
@@ -9280,64 +9642,7 @@
                   <a:pt x="0" y="185"/>
                 </a:lnTo>
                 <a:lnTo>
-                  <a:pt x="108" y="0"/>
-                </a:lnTo>
-                <a:close/>
-              </a:path>
-            </a:pathLst>
-          </a:custGeom>
-          <a:solidFill>
-            <a:srgbClr val="999999"/>
-          </a:solidFill>
-          <a:ln w="0">
-            <a:noFill/>
-          </a:ln>
-        </p:spPr>
-        <p:txBody>
-          <a:bodyPr lIns="0" tIns="0" rIns="0" bIns="0" anchor="t">
-            <a:noAutofit/>
-          </a:bodyPr>
-          <a:p>
-            <a:endParaRPr lang="en-US" sz="2400" b="0" u="none" strike="noStrike">
-              <a:solidFill>
-                <a:srgbClr val="FFFFFF"/>
-              </a:solidFill>
-              <a:effectLst/>
-              <a:uFillTx/>
-              <a:latin typeface="Times New Roman"/>
-            </a:endParaRPr>
-          </a:p>
-        </p:txBody>
-      </p:sp>
-      <p:sp>
-        <p:nvSpPr>
-          <p:cNvPr id="188" name=""/>
-          <p:cNvSpPr/>
-          <p:nvPr/>
-        </p:nvSpPr>
-        <p:spPr>
-          <a:xfrm>
-            <a:off x="4714200" y="4152600"/>
-            <a:ext cx="77040" cy="66960"/>
-          </a:xfrm>
-          <a:custGeom>
-            <a:avLst/>
-            <a:gdLst/>
-            <a:ahLst/>
-            <a:rect l="0" t="0" r="r" b="b"/>
-            <a:pathLst>
-              <a:path w="214" h="186">
-                <a:moveTo>
-                  <a:pt x="108" y="0"/>
-                </a:moveTo>
-                <a:lnTo>
-                  <a:pt x="214" y="186"/>
-                </a:lnTo>
-                <a:lnTo>
-                  <a:pt x="0" y="186"/>
-                </a:lnTo>
-                <a:lnTo>
-                  <a:pt x="108" y="0"/>
+                  <a:pt x="107" y="0"/>
                 </a:lnTo>
                 <a:close/>
               </a:path>
@@ -9368,184 +9673,13 @@
       </p:sp>
       <p:sp>
         <p:nvSpPr>
-          <p:cNvPr id="189" name=""/>
-          <p:cNvSpPr/>
-          <p:nvPr/>
-        </p:nvSpPr>
-        <p:spPr>
-          <a:xfrm>
-            <a:off x="3071880" y="3760200"/>
-            <a:ext cx="77040" cy="66960"/>
-          </a:xfrm>
-          <a:custGeom>
-            <a:avLst/>
-            <a:gdLst/>
-            <a:ahLst/>
-            <a:rect l="0" t="0" r="r" b="b"/>
-            <a:pathLst>
-              <a:path w="214" h="186">
-                <a:moveTo>
-                  <a:pt x="108" y="0"/>
-                </a:moveTo>
-                <a:lnTo>
-                  <a:pt x="214" y="186"/>
-                </a:lnTo>
-                <a:lnTo>
-                  <a:pt x="0" y="186"/>
-                </a:lnTo>
-                <a:lnTo>
-                  <a:pt x="108" y="0"/>
-                </a:lnTo>
-                <a:close/>
-              </a:path>
-            </a:pathLst>
-          </a:custGeom>
-          <a:solidFill>
-            <a:srgbClr val="0072B2"/>
-          </a:solidFill>
-          <a:ln w="0">
-            <a:noFill/>
-          </a:ln>
-        </p:spPr>
-        <p:txBody>
-          <a:bodyPr lIns="0" tIns="0" rIns="0" bIns="0" anchor="t">
-            <a:noAutofit/>
-          </a:bodyPr>
-          <a:p>
-            <a:endParaRPr lang="en-US" sz="2400" b="0" u="none" strike="noStrike">
-              <a:solidFill>
-                <a:srgbClr val="FFFFFF"/>
-              </a:solidFill>
-              <a:effectLst/>
-              <a:uFillTx/>
-              <a:latin typeface="Times New Roman"/>
-            </a:endParaRPr>
-          </a:p>
-        </p:txBody>
-      </p:sp>
-      <p:sp>
-        <p:nvSpPr>
-          <p:cNvPr id="190" name=""/>
-          <p:cNvSpPr/>
-          <p:nvPr/>
-        </p:nvSpPr>
-        <p:spPr>
-          <a:xfrm>
-            <a:off x="3466440" y="3521520"/>
-            <a:ext cx="77040" cy="66960"/>
-          </a:xfrm>
-          <a:custGeom>
-            <a:avLst/>
-            <a:gdLst/>
-            <a:ahLst/>
-            <a:rect l="0" t="0" r="r" b="b"/>
-            <a:pathLst>
-              <a:path w="214" h="186">
-                <a:moveTo>
-                  <a:pt x="108" y="0"/>
-                </a:moveTo>
-                <a:lnTo>
-                  <a:pt x="214" y="186"/>
-                </a:lnTo>
-                <a:lnTo>
-                  <a:pt x="0" y="186"/>
-                </a:lnTo>
-                <a:lnTo>
-                  <a:pt x="108" y="0"/>
-                </a:lnTo>
-                <a:close/>
-              </a:path>
-            </a:pathLst>
-          </a:custGeom>
-          <a:solidFill>
-            <a:srgbClr val="999999"/>
-          </a:solidFill>
-          <a:ln w="0">
-            <a:noFill/>
-          </a:ln>
-        </p:spPr>
-        <p:txBody>
-          <a:bodyPr lIns="0" tIns="0" rIns="0" bIns="0" anchor="t">
-            <a:noAutofit/>
-          </a:bodyPr>
-          <a:p>
-            <a:endParaRPr lang="en-US" sz="2400" b="0" u="none" strike="noStrike">
-              <a:solidFill>
-                <a:srgbClr val="FFFFFF"/>
-              </a:solidFill>
-              <a:effectLst/>
-              <a:uFillTx/>
-              <a:latin typeface="Times New Roman"/>
-            </a:endParaRPr>
-          </a:p>
-        </p:txBody>
-      </p:sp>
-      <p:sp>
-        <p:nvSpPr>
-          <p:cNvPr id="191" name=""/>
-          <p:cNvSpPr/>
-          <p:nvPr/>
-        </p:nvSpPr>
-        <p:spPr>
-          <a:xfrm>
-            <a:off x="3225960" y="3641040"/>
-            <a:ext cx="77040" cy="66600"/>
-          </a:xfrm>
-          <a:custGeom>
-            <a:avLst/>
-            <a:gdLst/>
-            <a:ahLst/>
-            <a:rect l="0" t="0" r="r" b="b"/>
-            <a:pathLst>
-              <a:path w="214" h="185">
-                <a:moveTo>
-                  <a:pt x="108" y="0"/>
-                </a:moveTo>
-                <a:lnTo>
-                  <a:pt x="214" y="185"/>
-                </a:lnTo>
-                <a:lnTo>
-                  <a:pt x="0" y="185"/>
-                </a:lnTo>
-                <a:lnTo>
-                  <a:pt x="108" y="0"/>
-                </a:lnTo>
-                <a:close/>
-              </a:path>
-            </a:pathLst>
-          </a:custGeom>
-          <a:solidFill>
-            <a:srgbClr val="E69F00"/>
-          </a:solidFill>
-          <a:ln w="0">
-            <a:noFill/>
-          </a:ln>
-        </p:spPr>
-        <p:txBody>
-          <a:bodyPr lIns="0" tIns="0" rIns="0" bIns="0" anchor="t">
-            <a:noAutofit/>
-          </a:bodyPr>
-          <a:p>
-            <a:endParaRPr lang="en-US" sz="2400" b="0" u="none" strike="noStrike">
-              <a:solidFill>
-                <a:srgbClr val="000000"/>
-              </a:solidFill>
-              <a:effectLst/>
-              <a:uFillTx/>
-              <a:latin typeface="Times New Roman"/>
-            </a:endParaRPr>
-          </a:p>
-        </p:txBody>
-      </p:sp>
-      <p:sp>
-        <p:nvSpPr>
-          <p:cNvPr id="192" name=""/>
-          <p:cNvSpPr/>
-          <p:nvPr/>
-        </p:nvSpPr>
-        <p:spPr>
-          <a:xfrm>
-            <a:off x="3821760" y="5370840"/>
+          <p:cNvPr id="195" name=""/>
+          <p:cNvSpPr/>
+          <p:nvPr/>
+        </p:nvSpPr>
+        <p:spPr>
+          <a:xfrm>
+            <a:off x="3729960" y="5370840"/>
             <a:ext cx="57240" cy="57600"/>
           </a:xfrm>
           <a:custGeom>
@@ -9597,14 +9731,14 @@
       </p:sp>
       <p:sp>
         <p:nvSpPr>
-          <p:cNvPr id="193" name=""/>
-          <p:cNvSpPr/>
-          <p:nvPr/>
-        </p:nvSpPr>
-        <p:spPr>
-          <a:xfrm>
-            <a:off x="3858840" y="5131800"/>
-            <a:ext cx="57240" cy="57240"/>
+          <p:cNvPr id="196" name=""/>
+          <p:cNvSpPr/>
+          <p:nvPr/>
+        </p:nvSpPr>
+        <p:spPr>
+          <a:xfrm>
+            <a:off x="3768840" y="5131800"/>
+            <a:ext cx="57600" cy="57240"/>
           </a:xfrm>
           <a:custGeom>
             <a:avLst/>
@@ -9612,17 +9746,17 @@
             <a:ahLst/>
             <a:rect l="0" t="0" r="r" b="b"/>
             <a:pathLst>
-              <a:path w="159" h="159">
+              <a:path w="160" h="159">
                 <a:moveTo>
                   <a:pt x="0" y="80"/>
                 </a:moveTo>
                 <a:cubicBezTo>
                   <a:pt x="0" y="-27"/>
-                  <a:pt x="159" y="-27"/>
-                  <a:pt x="159" y="80"/>
+                  <a:pt x="160" y="-27"/>
+                  <a:pt x="160" y="80"/>
                 </a:cubicBezTo>
                 <a:cubicBezTo>
-                  <a:pt x="159" y="185"/>
+                  <a:pt x="160" y="185"/>
                   <a:pt x="0" y="185"/>
                   <a:pt x="0" y="80"/>
                 </a:cubicBezTo>
@@ -9655,13 +9789,13 @@
       </p:sp>
       <p:sp>
         <p:nvSpPr>
-          <p:cNvPr id="194" name=""/>
-          <p:cNvSpPr/>
-          <p:nvPr/>
-        </p:nvSpPr>
-        <p:spPr>
-          <a:xfrm>
-            <a:off x="3834360" y="5251320"/>
+          <p:cNvPr id="197" name=""/>
+          <p:cNvSpPr/>
+          <p:nvPr/>
+        </p:nvSpPr>
+        <p:spPr>
+          <a:xfrm>
+            <a:off x="3738240" y="5251320"/>
             <a:ext cx="57240" cy="57240"/>
           </a:xfrm>
           <a:custGeom>
@@ -9713,13 +9847,13 @@
       </p:sp>
       <p:sp>
         <p:nvSpPr>
-          <p:cNvPr id="195" name=""/>
-          <p:cNvSpPr/>
-          <p:nvPr/>
-        </p:nvSpPr>
-        <p:spPr>
-          <a:xfrm>
-            <a:off x="3757680" y="4859280"/>
+          <p:cNvPr id="198" name=""/>
+          <p:cNvSpPr/>
+          <p:nvPr/>
+        </p:nvSpPr>
+        <p:spPr>
+          <a:xfrm>
+            <a:off x="3666600" y="4859280"/>
             <a:ext cx="57240" cy="57600"/>
           </a:xfrm>
           <a:custGeom>
@@ -9771,13 +9905,13 @@
       </p:sp>
       <p:sp>
         <p:nvSpPr>
-          <p:cNvPr id="196" name=""/>
-          <p:cNvSpPr/>
-          <p:nvPr/>
-        </p:nvSpPr>
-        <p:spPr>
-          <a:xfrm>
-            <a:off x="3782520" y="4620240"/>
+          <p:cNvPr id="199" name=""/>
+          <p:cNvSpPr/>
+          <p:nvPr/>
+        </p:nvSpPr>
+        <p:spPr>
+          <a:xfrm>
+            <a:off x="3692520" y="4620240"/>
             <a:ext cx="57240" cy="57240"/>
           </a:xfrm>
           <a:custGeom>
@@ -9829,14 +9963,14 @@
       </p:sp>
       <p:sp>
         <p:nvSpPr>
-          <p:cNvPr id="197" name=""/>
-          <p:cNvSpPr/>
-          <p:nvPr/>
-        </p:nvSpPr>
-        <p:spPr>
-          <a:xfrm>
-            <a:off x="3761280" y="4739760"/>
-            <a:ext cx="57240" cy="56880"/>
+          <p:cNvPr id="200" name=""/>
+          <p:cNvSpPr/>
+          <p:nvPr/>
+        </p:nvSpPr>
+        <p:spPr>
+          <a:xfrm>
+            <a:off x="3666240" y="4739760"/>
+            <a:ext cx="57600" cy="56880"/>
           </a:xfrm>
           <a:custGeom>
             <a:avLst/>
@@ -9844,17 +9978,17 @@
             <a:ahLst/>
             <a:rect l="0" t="0" r="r" b="b"/>
             <a:pathLst>
-              <a:path w="159" h="158">
+              <a:path w="160" h="158">
                 <a:moveTo>
                   <a:pt x="0" y="80"/>
                 </a:moveTo>
                 <a:cubicBezTo>
                   <a:pt x="0" y="-26"/>
-                  <a:pt x="159" y="-26"/>
-                  <a:pt x="159" y="80"/>
+                  <a:pt x="160" y="-26"/>
+                  <a:pt x="160" y="80"/>
                 </a:cubicBezTo>
                 <a:cubicBezTo>
-                  <a:pt x="159" y="185"/>
+                  <a:pt x="160" y="185"/>
                   <a:pt x="0" y="185"/>
                   <a:pt x="0" y="80"/>
                 </a:cubicBezTo>
@@ -9887,13 +10021,187 @@
       </p:sp>
       <p:sp>
         <p:nvSpPr>
-          <p:cNvPr id="198" name=""/>
-          <p:cNvSpPr/>
-          <p:nvPr/>
-        </p:nvSpPr>
-        <p:spPr>
-          <a:xfrm>
-            <a:off x="3896640" y="4347360"/>
+          <p:cNvPr id="201" name=""/>
+          <p:cNvSpPr/>
+          <p:nvPr/>
+        </p:nvSpPr>
+        <p:spPr>
+          <a:xfrm>
+            <a:off x="3807000" y="4347360"/>
+            <a:ext cx="57240" cy="57600"/>
+          </a:xfrm>
+          <a:custGeom>
+            <a:avLst/>
+            <a:gdLst/>
+            <a:ahLst/>
+            <a:rect l="0" t="0" r="r" b="b"/>
+            <a:pathLst>
+              <a:path w="159" h="160">
+                <a:moveTo>
+                  <a:pt x="0" y="80"/>
+                </a:moveTo>
+                <a:cubicBezTo>
+                  <a:pt x="0" y="-26"/>
+                  <a:pt x="159" y="-26"/>
+                  <a:pt x="159" y="80"/>
+                </a:cubicBezTo>
+                <a:cubicBezTo>
+                  <a:pt x="159" y="187"/>
+                  <a:pt x="0" y="187"/>
+                  <a:pt x="0" y="80"/>
+                </a:cubicBezTo>
+                <a:close/>
+              </a:path>
+            </a:pathLst>
+          </a:custGeom>
+          <a:solidFill>
+            <a:srgbClr val="0072B2"/>
+          </a:solidFill>
+          <a:ln w="0">
+            <a:noFill/>
+          </a:ln>
+        </p:spPr>
+        <p:txBody>
+          <a:bodyPr lIns="0" tIns="0" rIns="0" bIns="0" anchor="t">
+            <a:noAutofit/>
+          </a:bodyPr>
+          <a:p>
+            <a:endParaRPr lang="en-US" sz="2400" b="0" u="none" strike="noStrike">
+              <a:solidFill>
+                <a:srgbClr val="FFFFFF"/>
+              </a:solidFill>
+              <a:effectLst/>
+              <a:uFillTx/>
+              <a:latin typeface="Times New Roman"/>
+            </a:endParaRPr>
+          </a:p>
+        </p:txBody>
+      </p:sp>
+      <p:sp>
+        <p:nvSpPr>
+          <p:cNvPr id="202" name=""/>
+          <p:cNvSpPr/>
+          <p:nvPr/>
+        </p:nvSpPr>
+        <p:spPr>
+          <a:xfrm>
+            <a:off x="3859200" y="4108680"/>
+            <a:ext cx="57240" cy="57240"/>
+          </a:xfrm>
+          <a:custGeom>
+            <a:avLst/>
+            <a:gdLst/>
+            <a:ahLst/>
+            <a:rect l="0" t="0" r="r" b="b"/>
+            <a:pathLst>
+              <a:path w="159" h="159">
+                <a:moveTo>
+                  <a:pt x="0" y="80"/>
+                </a:moveTo>
+                <a:cubicBezTo>
+                  <a:pt x="0" y="-26"/>
+                  <a:pt x="159" y="-26"/>
+                  <a:pt x="159" y="80"/>
+                </a:cubicBezTo>
+                <a:cubicBezTo>
+                  <a:pt x="159" y="186"/>
+                  <a:pt x="0" y="186"/>
+                  <a:pt x="0" y="80"/>
+                </a:cubicBezTo>
+                <a:close/>
+              </a:path>
+            </a:pathLst>
+          </a:custGeom>
+          <a:solidFill>
+            <a:srgbClr val="999999"/>
+          </a:solidFill>
+          <a:ln w="0">
+            <a:noFill/>
+          </a:ln>
+        </p:spPr>
+        <p:txBody>
+          <a:bodyPr lIns="0" tIns="0" rIns="0" bIns="0" anchor="t">
+            <a:noAutofit/>
+          </a:bodyPr>
+          <a:p>
+            <a:endParaRPr lang="en-US" sz="2400" b="0" u="none" strike="noStrike">
+              <a:solidFill>
+                <a:srgbClr val="FFFFFF"/>
+              </a:solidFill>
+              <a:effectLst/>
+              <a:uFillTx/>
+              <a:latin typeface="Times New Roman"/>
+            </a:endParaRPr>
+          </a:p>
+        </p:txBody>
+      </p:sp>
+      <p:sp>
+        <p:nvSpPr>
+          <p:cNvPr id="203" name=""/>
+          <p:cNvSpPr/>
+          <p:nvPr/>
+        </p:nvSpPr>
+        <p:spPr>
+          <a:xfrm>
+            <a:off x="3821760" y="4228200"/>
+            <a:ext cx="57240" cy="57600"/>
+          </a:xfrm>
+          <a:custGeom>
+            <a:avLst/>
+            <a:gdLst/>
+            <a:ahLst/>
+            <a:rect l="0" t="0" r="r" b="b"/>
+            <a:pathLst>
+              <a:path w="159" h="160">
+                <a:moveTo>
+                  <a:pt x="0" y="80"/>
+                </a:moveTo>
+                <a:cubicBezTo>
+                  <a:pt x="0" y="-27"/>
+                  <a:pt x="159" y="-27"/>
+                  <a:pt x="159" y="80"/>
+                </a:cubicBezTo>
+                <a:cubicBezTo>
+                  <a:pt x="159" y="186"/>
+                  <a:pt x="0" y="186"/>
+                  <a:pt x="0" y="80"/>
+                </a:cubicBezTo>
+                <a:close/>
+              </a:path>
+            </a:pathLst>
+          </a:custGeom>
+          <a:solidFill>
+            <a:srgbClr val="E69F00"/>
+          </a:solidFill>
+          <a:ln w="0">
+            <a:noFill/>
+          </a:ln>
+        </p:spPr>
+        <p:txBody>
+          <a:bodyPr lIns="0" tIns="0" rIns="0" bIns="0" anchor="t">
+            <a:noAutofit/>
+          </a:bodyPr>
+          <a:p>
+            <a:endParaRPr lang="en-US" sz="2400" b="0" u="none" strike="noStrike">
+              <a:solidFill>
+                <a:srgbClr val="000000"/>
+              </a:solidFill>
+              <a:effectLst/>
+              <a:uFillTx/>
+              <a:latin typeface="Times New Roman"/>
+            </a:endParaRPr>
+          </a:p>
+        </p:txBody>
+      </p:sp>
+      <p:sp>
+        <p:nvSpPr>
+          <p:cNvPr id="204" name=""/>
+          <p:cNvSpPr/>
+          <p:nvPr/>
+        </p:nvSpPr>
+        <p:spPr>
+          <a:xfrm>
+            <a:off x="3509640" y="3835800"/>
             <a:ext cx="57600" cy="57600"/>
           </a:xfrm>
           <a:custGeom>
@@ -9945,13 +10253,13 @@
       </p:sp>
       <p:sp>
         <p:nvSpPr>
-          <p:cNvPr id="199" name=""/>
-          <p:cNvSpPr/>
-          <p:nvPr/>
-        </p:nvSpPr>
-        <p:spPr>
-          <a:xfrm>
-            <a:off x="3947040" y="4108680"/>
+          <p:cNvPr id="205" name=""/>
+          <p:cNvSpPr/>
+          <p:nvPr/>
+        </p:nvSpPr>
+        <p:spPr>
+          <a:xfrm>
+            <a:off x="3545640" y="3597120"/>
             <a:ext cx="57240" cy="57240"/>
           </a:xfrm>
           <a:custGeom>
@@ -10003,13 +10311,13 @@
       </p:sp>
       <p:sp>
         <p:nvSpPr>
-          <p:cNvPr id="200" name=""/>
-          <p:cNvSpPr/>
-          <p:nvPr/>
-        </p:nvSpPr>
-        <p:spPr>
-          <a:xfrm>
-            <a:off x="3912840" y="4228200"/>
+          <p:cNvPr id="206" name=""/>
+          <p:cNvSpPr/>
+          <p:nvPr/>
+        </p:nvSpPr>
+        <p:spPr>
+          <a:xfrm>
+            <a:off x="3504600" y="3716640"/>
             <a:ext cx="57600" cy="57600"/>
           </a:xfrm>
           <a:custGeom>
@@ -10061,181 +10369,7 @@
       </p:sp>
       <p:sp>
         <p:nvSpPr>
-          <p:cNvPr id="201" name=""/>
-          <p:cNvSpPr/>
-          <p:nvPr/>
-        </p:nvSpPr>
-        <p:spPr>
-          <a:xfrm>
-            <a:off x="3608280" y="3835800"/>
-            <a:ext cx="57240" cy="57600"/>
-          </a:xfrm>
-          <a:custGeom>
-            <a:avLst/>
-            <a:gdLst/>
-            <a:ahLst/>
-            <a:rect l="0" t="0" r="r" b="b"/>
-            <a:pathLst>
-              <a:path w="159" h="160">
-                <a:moveTo>
-                  <a:pt x="0" y="80"/>
-                </a:moveTo>
-                <a:cubicBezTo>
-                  <a:pt x="0" y="-26"/>
-                  <a:pt x="159" y="-26"/>
-                  <a:pt x="159" y="80"/>
-                </a:cubicBezTo>
-                <a:cubicBezTo>
-                  <a:pt x="159" y="187"/>
-                  <a:pt x="0" y="187"/>
-                  <a:pt x="0" y="80"/>
-                </a:cubicBezTo>
-                <a:close/>
-              </a:path>
-            </a:pathLst>
-          </a:custGeom>
-          <a:solidFill>
-            <a:srgbClr val="0072B2"/>
-          </a:solidFill>
-          <a:ln w="0">
-            <a:noFill/>
-          </a:ln>
-        </p:spPr>
-        <p:txBody>
-          <a:bodyPr lIns="0" tIns="0" rIns="0" bIns="0" anchor="t">
-            <a:noAutofit/>
-          </a:bodyPr>
-          <a:p>
-            <a:endParaRPr lang="en-US" sz="2400" b="0" u="none" strike="noStrike">
-              <a:solidFill>
-                <a:srgbClr val="FFFFFF"/>
-              </a:solidFill>
-              <a:effectLst/>
-              <a:uFillTx/>
-              <a:latin typeface="Times New Roman"/>
-            </a:endParaRPr>
-          </a:p>
-        </p:txBody>
-      </p:sp>
-      <p:sp>
-        <p:nvSpPr>
-          <p:cNvPr id="202" name=""/>
-          <p:cNvSpPr/>
-          <p:nvPr/>
-        </p:nvSpPr>
-        <p:spPr>
-          <a:xfrm>
-            <a:off x="3645360" y="3597120"/>
-            <a:ext cx="57240" cy="57240"/>
-          </a:xfrm>
-          <a:custGeom>
-            <a:avLst/>
-            <a:gdLst/>
-            <a:ahLst/>
-            <a:rect l="0" t="0" r="r" b="b"/>
-            <a:pathLst>
-              <a:path w="159" h="159">
-                <a:moveTo>
-                  <a:pt x="0" y="80"/>
-                </a:moveTo>
-                <a:cubicBezTo>
-                  <a:pt x="0" y="-26"/>
-                  <a:pt x="159" y="-26"/>
-                  <a:pt x="159" y="80"/>
-                </a:cubicBezTo>
-                <a:cubicBezTo>
-                  <a:pt x="159" y="186"/>
-                  <a:pt x="0" y="186"/>
-                  <a:pt x="0" y="80"/>
-                </a:cubicBezTo>
-                <a:close/>
-              </a:path>
-            </a:pathLst>
-          </a:custGeom>
-          <a:solidFill>
-            <a:srgbClr val="999999"/>
-          </a:solidFill>
-          <a:ln w="0">
-            <a:noFill/>
-          </a:ln>
-        </p:spPr>
-        <p:txBody>
-          <a:bodyPr lIns="0" tIns="0" rIns="0" bIns="0" anchor="t">
-            <a:noAutofit/>
-          </a:bodyPr>
-          <a:p>
-            <a:endParaRPr lang="en-US" sz="2400" b="0" u="none" strike="noStrike">
-              <a:solidFill>
-                <a:srgbClr val="FFFFFF"/>
-              </a:solidFill>
-              <a:effectLst/>
-              <a:uFillTx/>
-              <a:latin typeface="Times New Roman"/>
-            </a:endParaRPr>
-          </a:p>
-        </p:txBody>
-      </p:sp>
-      <p:sp>
-        <p:nvSpPr>
-          <p:cNvPr id="203" name=""/>
-          <p:cNvSpPr/>
-          <p:nvPr/>
-        </p:nvSpPr>
-        <p:spPr>
-          <a:xfrm>
-            <a:off x="3606120" y="3716640"/>
-            <a:ext cx="57600" cy="57600"/>
-          </a:xfrm>
-          <a:custGeom>
-            <a:avLst/>
-            <a:gdLst/>
-            <a:ahLst/>
-            <a:rect l="0" t="0" r="r" b="b"/>
-            <a:pathLst>
-              <a:path w="160" h="160">
-                <a:moveTo>
-                  <a:pt x="0" y="80"/>
-                </a:moveTo>
-                <a:cubicBezTo>
-                  <a:pt x="0" y="-27"/>
-                  <a:pt x="160" y="-27"/>
-                  <a:pt x="160" y="80"/>
-                </a:cubicBezTo>
-                <a:cubicBezTo>
-                  <a:pt x="160" y="186"/>
-                  <a:pt x="0" y="186"/>
-                  <a:pt x="0" y="80"/>
-                </a:cubicBezTo>
-                <a:close/>
-              </a:path>
-            </a:pathLst>
-          </a:custGeom>
-          <a:solidFill>
-            <a:srgbClr val="E69F00"/>
-          </a:solidFill>
-          <a:ln w="0">
-            <a:noFill/>
-          </a:ln>
-        </p:spPr>
-        <p:txBody>
-          <a:bodyPr lIns="0" tIns="0" rIns="0" bIns="0" anchor="t">
-            <a:noAutofit/>
-          </a:bodyPr>
-          <a:p>
-            <a:endParaRPr lang="en-US" sz="2400" b="0" u="none" strike="noStrike">
-              <a:solidFill>
-                <a:srgbClr val="000000"/>
-              </a:solidFill>
-              <a:effectLst/>
-              <a:uFillTx/>
-              <a:latin typeface="Times New Roman"/>
-            </a:endParaRPr>
-          </a:p>
-        </p:txBody>
-      </p:sp>
-      <p:sp>
-        <p:nvSpPr>
-          <p:cNvPr id="204" name=""/>
+          <p:cNvPr id="207" name=""/>
           <p:cNvSpPr/>
           <p:nvPr/>
         </p:nvSpPr>
@@ -10278,7 +10412,7 @@
       </p:sp>
       <p:sp>
         <p:nvSpPr>
-          <p:cNvPr id="205" name=""/>
+          <p:cNvPr id="208" name=""/>
           <p:cNvSpPr txBox="1"/>
           <p:nvPr/>
         </p:nvSpPr>
@@ -10326,7 +10460,7 @@
       </p:sp>
       <p:sp>
         <p:nvSpPr>
-          <p:cNvPr id="206" name=""/>
+          <p:cNvPr id="209" name=""/>
           <p:cNvSpPr txBox="1"/>
           <p:nvPr/>
         </p:nvSpPr>
@@ -10374,7 +10508,7 @@
       </p:sp>
       <p:sp>
         <p:nvSpPr>
-          <p:cNvPr id="207" name=""/>
+          <p:cNvPr id="210" name=""/>
           <p:cNvSpPr txBox="1"/>
           <p:nvPr/>
         </p:nvSpPr>
@@ -10422,7 +10556,7 @@
       </p:sp>
       <p:sp>
         <p:nvSpPr>
-          <p:cNvPr id="208" name=""/>
+          <p:cNvPr id="211" name=""/>
           <p:cNvSpPr txBox="1"/>
           <p:nvPr/>
         </p:nvSpPr>
@@ -10470,7 +10604,7 @@
       </p:sp>
       <p:sp>
         <p:nvSpPr>
-          <p:cNvPr id="209" name=""/>
+          <p:cNvPr id="212" name=""/>
           <p:cNvSpPr/>
           <p:nvPr/>
         </p:nvSpPr>
@@ -10513,7 +10647,7 @@
       </p:sp>
       <p:sp>
         <p:nvSpPr>
-          <p:cNvPr id="210" name=""/>
+          <p:cNvPr id="213" name=""/>
           <p:cNvSpPr/>
           <p:nvPr/>
         </p:nvSpPr>
@@ -10556,7 +10690,7 @@
       </p:sp>
       <p:sp>
         <p:nvSpPr>
-          <p:cNvPr id="211" name=""/>
+          <p:cNvPr id="214" name=""/>
           <p:cNvSpPr/>
           <p:nvPr/>
         </p:nvSpPr>
@@ -10599,7 +10733,7 @@
       </p:sp>
       <p:sp>
         <p:nvSpPr>
-          <p:cNvPr id="212" name=""/>
+          <p:cNvPr id="215" name=""/>
           <p:cNvSpPr/>
           <p:nvPr/>
         </p:nvSpPr>
@@ -10642,7 +10776,7 @@
       </p:sp>
       <p:sp>
         <p:nvSpPr>
-          <p:cNvPr id="213" name=""/>
+          <p:cNvPr id="216" name=""/>
           <p:cNvSpPr/>
           <p:nvPr/>
         </p:nvSpPr>
@@ -10685,7 +10819,7 @@
       </p:sp>
       <p:sp>
         <p:nvSpPr>
-          <p:cNvPr id="214" name=""/>
+          <p:cNvPr id="217" name=""/>
           <p:cNvSpPr/>
           <p:nvPr/>
         </p:nvSpPr>
@@ -10728,13 +10862,13 @@
       </p:sp>
       <p:sp>
         <p:nvSpPr>
-          <p:cNvPr id="215" name=""/>
+          <p:cNvPr id="218" name=""/>
           <p:cNvSpPr/>
           <p:nvPr/>
         </p:nvSpPr>
         <p:spPr>
           <a:xfrm flipV="1">
-            <a:off x="2775240" y="5556960"/>
+            <a:off x="2713680" y="5556960"/>
             <a:ext cx="0" cy="31680"/>
           </a:xfrm>
           <a:prstGeom prst="line">
@@ -10771,13 +10905,13 @@
       </p:sp>
       <p:sp>
         <p:nvSpPr>
-          <p:cNvPr id="216" name=""/>
+          <p:cNvPr id="219" name=""/>
           <p:cNvSpPr/>
           <p:nvPr/>
         </p:nvSpPr>
         <p:spPr>
           <a:xfrm flipV="1">
-            <a:off x="4105080" y="5556960"/>
+            <a:off x="3981960" y="5556960"/>
             <a:ext cx="0" cy="31680"/>
           </a:xfrm>
           <a:prstGeom prst="line">
@@ -10814,13 +10948,13 @@
       </p:sp>
       <p:sp>
         <p:nvSpPr>
-          <p:cNvPr id="217" name=""/>
+          <p:cNvPr id="220" name=""/>
           <p:cNvSpPr/>
           <p:nvPr/>
         </p:nvSpPr>
         <p:spPr>
           <a:xfrm flipV="1">
-            <a:off x="5434920" y="5556960"/>
+            <a:off x="5249880" y="5556960"/>
             <a:ext cx="0" cy="31680"/>
           </a:xfrm>
           <a:prstGeom prst="line">
@@ -10857,7 +10991,7 @@
       </p:sp>
       <p:sp>
         <p:nvSpPr>
-          <p:cNvPr id="218" name=""/>
+          <p:cNvPr id="221" name=""/>
           <p:cNvSpPr txBox="1"/>
           <p:nvPr/>
         </p:nvSpPr>
@@ -10905,7 +11039,7 @@
       </p:sp>
       <p:sp>
         <p:nvSpPr>
-          <p:cNvPr id="219" name=""/>
+          <p:cNvPr id="222" name=""/>
           <p:cNvSpPr txBox="1"/>
           <p:nvPr/>
         </p:nvSpPr>
@@ -10953,13 +11087,13 @@
       </p:sp>
       <p:sp>
         <p:nvSpPr>
-          <p:cNvPr id="220" name=""/>
+          <p:cNvPr id="223" name=""/>
           <p:cNvSpPr txBox="1"/>
           <p:nvPr/>
         </p:nvSpPr>
         <p:spPr>
           <a:xfrm>
-            <a:off x="2711880" y="5601240"/>
+            <a:off x="2650320" y="5601240"/>
             <a:ext cx="142560" cy="102600"/>
           </a:xfrm>
           <a:prstGeom prst="rect">
@@ -11001,13 +11135,13 @@
       </p:sp>
       <p:sp>
         <p:nvSpPr>
-          <p:cNvPr id="221" name=""/>
+          <p:cNvPr id="224" name=""/>
           <p:cNvSpPr txBox="1"/>
           <p:nvPr/>
         </p:nvSpPr>
         <p:spPr>
           <a:xfrm>
-            <a:off x="4041720" y="5601240"/>
+            <a:off x="3918600" y="5601240"/>
             <a:ext cx="142560" cy="102600"/>
           </a:xfrm>
           <a:prstGeom prst="rect">
@@ -11049,13 +11183,13 @@
       </p:sp>
       <p:sp>
         <p:nvSpPr>
-          <p:cNvPr id="222" name=""/>
+          <p:cNvPr id="225" name=""/>
           <p:cNvSpPr txBox="1"/>
           <p:nvPr/>
         </p:nvSpPr>
         <p:spPr>
           <a:xfrm>
-            <a:off x="5371920" y="5601240"/>
+            <a:off x="5186520" y="5601240"/>
             <a:ext cx="142560" cy="102600"/>
           </a:xfrm>
           <a:prstGeom prst="rect">
@@ -11097,7 +11231,7 @@
       </p:sp>
       <p:sp>
         <p:nvSpPr>
-          <p:cNvPr id="223" name=""/>
+          <p:cNvPr id="226" name=""/>
           <p:cNvSpPr/>
           <p:nvPr/>
         </p:nvSpPr>
@@ -11157,7 +11291,7 @@
       </p:sp>
       <p:sp>
         <p:nvSpPr>
-          <p:cNvPr id="224" name=""/>
+          <p:cNvPr id="227" name=""/>
           <p:cNvSpPr txBox="1"/>
           <p:nvPr/>
         </p:nvSpPr>
@@ -11205,7 +11339,7 @@
       </p:sp>
       <p:sp>
         <p:nvSpPr>
-          <p:cNvPr id="225" name=""/>
+          <p:cNvPr id="228" name=""/>
           <p:cNvSpPr/>
           <p:nvPr/>
         </p:nvSpPr>
@@ -11265,7 +11399,7 @@
       </p:sp>
       <p:sp>
         <p:nvSpPr>
-          <p:cNvPr id="226" name=""/>
+          <p:cNvPr id="229" name=""/>
           <p:cNvSpPr/>
           <p:nvPr/>
         </p:nvSpPr>
@@ -11308,7 +11442,7 @@
       </p:sp>
       <p:sp>
         <p:nvSpPr>
-          <p:cNvPr id="227" name=""/>
+          <p:cNvPr id="230" name=""/>
           <p:cNvSpPr/>
           <p:nvPr/>
         </p:nvSpPr>
@@ -11366,7 +11500,7 @@
       </p:sp>
       <p:sp>
         <p:nvSpPr>
-          <p:cNvPr id="228" name=""/>
+          <p:cNvPr id="231" name=""/>
           <p:cNvSpPr/>
           <p:nvPr/>
         </p:nvSpPr>
@@ -11423,7 +11557,7 @@
       </p:sp>
       <p:sp>
         <p:nvSpPr>
-          <p:cNvPr id="229" name=""/>
+          <p:cNvPr id="232" name=""/>
           <p:cNvSpPr/>
           <p:nvPr/>
         </p:nvSpPr>
@@ -11483,7 +11617,7 @@
       </p:sp>
       <p:sp>
         <p:nvSpPr>
-          <p:cNvPr id="230" name=""/>
+          <p:cNvPr id="233" name=""/>
           <p:cNvSpPr/>
           <p:nvPr/>
         </p:nvSpPr>
@@ -11526,7 +11660,7 @@
       </p:sp>
       <p:sp>
         <p:nvSpPr>
-          <p:cNvPr id="231" name=""/>
+          <p:cNvPr id="234" name=""/>
           <p:cNvSpPr/>
           <p:nvPr/>
         </p:nvSpPr>
@@ -11584,7 +11718,7 @@
       </p:sp>
       <p:sp>
         <p:nvSpPr>
-          <p:cNvPr id="232" name=""/>
+          <p:cNvPr id="235" name=""/>
           <p:cNvSpPr/>
           <p:nvPr/>
         </p:nvSpPr>
@@ -11641,7 +11775,7 @@
       </p:sp>
       <p:sp>
         <p:nvSpPr>
-          <p:cNvPr id="233" name=""/>
+          <p:cNvPr id="236" name=""/>
           <p:cNvSpPr/>
           <p:nvPr/>
         </p:nvSpPr>
@@ -11701,7 +11835,7 @@
       </p:sp>
       <p:sp>
         <p:nvSpPr>
-          <p:cNvPr id="234" name=""/>
+          <p:cNvPr id="237" name=""/>
           <p:cNvSpPr/>
           <p:nvPr/>
         </p:nvSpPr>
@@ -11744,7 +11878,7 @@
       </p:sp>
       <p:sp>
         <p:nvSpPr>
-          <p:cNvPr id="235" name=""/>
+          <p:cNvPr id="238" name=""/>
           <p:cNvSpPr/>
           <p:nvPr/>
         </p:nvSpPr>
@@ -11802,7 +11936,7 @@
       </p:sp>
       <p:sp>
         <p:nvSpPr>
-          <p:cNvPr id="236" name=""/>
+          <p:cNvPr id="239" name=""/>
           <p:cNvSpPr/>
           <p:nvPr/>
         </p:nvSpPr>
@@ -11859,7 +11993,7 @@
       </p:sp>
       <p:sp>
         <p:nvSpPr>
-          <p:cNvPr id="237" name=""/>
+          <p:cNvPr id="240" name=""/>
           <p:cNvSpPr txBox="1"/>
           <p:nvPr/>
         </p:nvSpPr>
@@ -11907,7 +12041,7 @@
       </p:sp>
       <p:sp>
         <p:nvSpPr>
-          <p:cNvPr id="238" name=""/>
+          <p:cNvPr id="241" name=""/>
           <p:cNvSpPr txBox="1"/>
           <p:nvPr/>
         </p:nvSpPr>
@@ -11955,7 +12089,7 @@
       </p:sp>
       <p:sp>
         <p:nvSpPr>
-          <p:cNvPr id="239" name=""/>
+          <p:cNvPr id="242" name=""/>
           <p:cNvSpPr txBox="1"/>
           <p:nvPr/>
         </p:nvSpPr>
@@ -12003,7 +12137,7 @@
       </p:sp>
       <p:sp>
         <p:nvSpPr>
-          <p:cNvPr id="240" name=""/>
+          <p:cNvPr id="243" name=""/>
           <p:cNvSpPr/>
           <p:nvPr/>
         </p:nvSpPr>
@@ -12063,7 +12197,7 @@
       </p:sp>
       <p:sp>
         <p:nvSpPr>
-          <p:cNvPr id="241" name=""/>
+          <p:cNvPr id="244" name=""/>
           <p:cNvSpPr txBox="1"/>
           <p:nvPr/>
         </p:nvSpPr>
@@ -12111,7 +12245,7 @@
       </p:sp>
       <p:sp>
         <p:nvSpPr>
-          <p:cNvPr id="242" name=""/>
+          <p:cNvPr id="245" name=""/>
           <p:cNvSpPr/>
           <p:nvPr/>
         </p:nvSpPr>
@@ -12171,7 +12305,7 @@
       </p:sp>
       <p:sp>
         <p:nvSpPr>
-          <p:cNvPr id="243" name=""/>
+          <p:cNvPr id="246" name=""/>
           <p:cNvSpPr/>
           <p:nvPr/>
         </p:nvSpPr>
@@ -12229,7 +12363,7 @@
       </p:sp>
       <p:sp>
         <p:nvSpPr>
-          <p:cNvPr id="244" name=""/>
+          <p:cNvPr id="247" name=""/>
           <p:cNvSpPr/>
           <p:nvPr/>
         </p:nvSpPr>
@@ -12289,7 +12423,7 @@
       </p:sp>
       <p:sp>
         <p:nvSpPr>
-          <p:cNvPr id="245" name=""/>
+          <p:cNvPr id="248" name=""/>
           <p:cNvSpPr/>
           <p:nvPr/>
         </p:nvSpPr>
@@ -12346,7 +12480,7 @@
       </p:sp>
       <p:sp>
         <p:nvSpPr>
-          <p:cNvPr id="246" name=""/>
+          <p:cNvPr id="249" name=""/>
           <p:cNvSpPr txBox="1"/>
           <p:nvPr/>
         </p:nvSpPr>
@@ -12394,7 +12528,7 @@
       </p:sp>
       <p:sp>
         <p:nvSpPr>
-          <p:cNvPr id="247" name=""/>
+          <p:cNvPr id="250" name=""/>
           <p:cNvSpPr txBox="1"/>
           <p:nvPr/>
         </p:nvSpPr>
@@ -12442,7 +12576,7 @@
       </p:sp>
       <p:sp>
         <p:nvSpPr>
-          <p:cNvPr id="248" name=""/>
+          <p:cNvPr id="251" name=""/>
           <p:cNvSpPr txBox="1"/>
           <p:nvPr/>
         </p:nvSpPr>
@@ -12490,7 +12624,7 @@
       </p:sp>
       <p:sp>
         <p:nvSpPr>
-          <p:cNvPr id="249" name=""/>
+          <p:cNvPr id="252" name=""/>
           <p:cNvSpPr txBox="1"/>
           <p:nvPr/>
         </p:nvSpPr>
@@ -12538,7 +12672,7 @@
       </p:sp>
       <p:sp>
         <p:nvSpPr>
-          <p:cNvPr id="250" name=""/>
+          <p:cNvPr id="253" name=""/>
           <p:cNvSpPr txBox="1"/>
           <p:nvPr/>
         </p:nvSpPr>
@@ -12586,7 +12720,7 @@
       </p:sp>
       <p:sp>
         <p:nvSpPr>
-          <p:cNvPr id="251" name=""/>
+          <p:cNvPr id="254" name=""/>
           <p:cNvSpPr txBox="1"/>
           <p:nvPr/>
         </p:nvSpPr>
